--- a/pptx_templates/BB_modelo.pptx
+++ b/pptx_templates/BB_modelo.pptx
@@ -5,12 +5,12 @@
     <p:sldMasterId id="2147483696" r:id="rId1"/>
   </p:sldMasterIdLst>
   <p:notesMasterIdLst>
-    <p:notesMasterId r:id="rId139"/>
+    <p:notesMasterId r:id="rId20"/>
   </p:notesMasterIdLst>
   <p:sldIdLst>
     <p:sldId id="268" r:id="rId2"/>
     <p:sldId id="256" r:id="rId3"/>
-    <p:sldId id="291" r:id="rId5"/>
+    <p:sldId id="499" r:id="rId5"/>
   </p:sldIdLst>
   <p:sldSz cx="12192000" cy="6858000"/>
   <p:notesSz cx="6858000" cy="9144000"/>
@@ -138,6 +138,12 @@
 </p:presentation>
 </file>
 
+<file path=ppt/authors.xml><?xml version="1.0" encoding="utf-8"?>
+<p188:authorLst xmlns:a="http://schemas.openxmlformats.org/drawingml/2006/main" xmlns:r="http://schemas.openxmlformats.org/officeDocument/2006/relationships" xmlns:p188="http://schemas.microsoft.com/office/powerpoint/2018/8/main">
+  <p188:author id="{E9433C93-73B7-0E4B-808E-05F9D8372758}" name="Produto 4" initials="P4" userId="df0a78875dbc6480" providerId="Windows Live"/>
+</p188:authorLst>
+</file>
+
 <file path=ppt/commentAuthors.xml><?xml version="1.0" encoding="utf-8"?>
 <p:cmAuthorLst xmlns:a="http://schemas.openxmlformats.org/drawingml/2006/main" xmlns:r="http://schemas.openxmlformats.org/officeDocument/2006/relationships" xmlns:p="http://schemas.openxmlformats.org/presentationml/2006/main">
   <p:cmAuthor id="1" name="Administrativo - Aprovasim" initials="AA" lastIdx="1" clrIdx="0">
@@ -150,23 +156,31 @@
 </p:cmAuthorLst>
 </file>
 
+<file path=ppt/revisionInfo.xml><?xml version="1.0" encoding="utf-8"?>
+<p1510:revInfo xmlns:a="http://schemas.openxmlformats.org/drawingml/2006/main" xmlns:r="http://schemas.openxmlformats.org/officeDocument/2006/relationships" xmlns:p1510="http://schemas.microsoft.com/office/powerpoint/2015/10/main">
+  <p1510:revLst>
+    <p1510:client id="{E165FE1D-CC1F-42B2-BFF4-3DD754D06CD5}" v="32" dt="2026-07-02T12:26:26.529"/>
+  </p1510:revLst>
+</p1510:revInfo>
+</file>
+
 <file path=ppt/changesInfos/changesInfo1.xml><?xml version="1.0" encoding="utf-8"?>
 <pc:chgInfo xmlns:a="http://schemas.openxmlformats.org/drawingml/2006/main" xmlns:r="http://schemas.openxmlformats.org/officeDocument/2006/relationships" xmlns:ac="http://schemas.microsoft.com/office/drawing/2013/main/command" xmlns:pc="http://schemas.microsoft.com/office/powerpoint/2013/main/command">
   <pc:docChgLst>
     <pc:chgData name="diagramador@aprovasim.com" userId="08c27f4fd777aeb1" providerId="LiveId" clId="{6DA82D89-F719-4B18-ABAA-0D43E56AF532}"/>
     <pc:docChg chg="undo custSel addSld delSld modSld sldOrd">
-      <pc:chgData name="diagramador@aprovasim.com" userId="08c27f4fd777aeb1" providerId="LiveId" clId="{6DA82D89-F719-4B18-ABAA-0D43E56AF532}" dt="2026-02-09T14:43:51.825" v="767" actId="20577"/>
+      <pc:chgData name="diagramador@aprovasim.com" userId="08c27f4fd777aeb1" providerId="LiveId" clId="{6DA82D89-F719-4B18-ABAA-0D43E56AF532}" dt="2026-07-02T12:28:50.590" v="1350" actId="948"/>
       <pc:docMkLst>
         <pc:docMk/>
       </pc:docMkLst>
-      <pc:sldChg chg="delSp modSp mod">
-        <pc:chgData name="diagramador@aprovasim.com" userId="08c27f4fd777aeb1" providerId="LiveId" clId="{6DA82D89-F719-4B18-ABAA-0D43E56AF532}" dt="2026-02-09T13:38:02.500" v="9" actId="20577"/>
+      <pc:sldChg chg="modSp mod">
+        <pc:chgData name="diagramador@aprovasim.com" userId="08c27f4fd777aeb1" providerId="LiveId" clId="{6DA82D89-F719-4B18-ABAA-0D43E56AF532}" dt="2026-07-01T17:13:35.384" v="525" actId="20577"/>
         <pc:sldMkLst>
           <pc:docMk/>
           <pc:sldMk cId="0" sldId="256"/>
         </pc:sldMkLst>
         <pc:spChg chg="mod">
-          <ac:chgData name="diagramador@aprovasim.com" userId="08c27f4fd777aeb1" providerId="LiveId" clId="{6DA82D89-F719-4B18-ABAA-0D43E56AF532}" dt="2026-02-09T13:38:02.500" v="9" actId="20577"/>
+          <ac:chgData name="diagramador@aprovasim.com" userId="08c27f4fd777aeb1" providerId="LiveId" clId="{6DA82D89-F719-4B18-ABAA-0D43E56AF532}" dt="2026-07-01T17:13:35.384" v="525" actId="20577"/>
           <ac:spMkLst>
             <pc:docMk/>
             <pc:sldMk cId="0" sldId="256"/>
@@ -175,1135 +189,624 @@
         </pc:spChg>
       </pc:sldChg>
       <pc:sldChg chg="modSp mod">
-        <pc:chgData name="diagramador@aprovasim.com" userId="08c27f4fd777aeb1" providerId="LiveId" clId="{6DA82D89-F719-4B18-ABAA-0D43E56AF532}" dt="2026-02-09T13:57:31.819" v="176" actId="948"/>
+        <pc:chgData name="diagramador@aprovasim.com" userId="08c27f4fd777aeb1" providerId="LiveId" clId="{6DA82D89-F719-4B18-ABAA-0D43E56AF532}" dt="2026-07-01T17:13:54.794" v="557" actId="1076"/>
         <pc:sldMkLst>
           <pc:docMk/>
-          <pc:sldMk cId="3174825568" sldId="298"/>
+          <pc:sldMk cId="0" sldId="258"/>
         </pc:sldMkLst>
         <pc:spChg chg="mod">
-          <ac:chgData name="diagramador@aprovasim.com" userId="08c27f4fd777aeb1" providerId="LiveId" clId="{6DA82D89-F719-4B18-ABAA-0D43E56AF532}" dt="2026-02-09T13:57:31.819" v="176" actId="948"/>
+          <ac:chgData name="diagramador@aprovasim.com" userId="08c27f4fd777aeb1" providerId="LiveId" clId="{6DA82D89-F719-4B18-ABAA-0D43E56AF532}" dt="2026-07-01T17:13:54.794" v="557" actId="1076"/>
           <ac:spMkLst>
             <pc:docMk/>
-            <pc:sldMk cId="3174825568" sldId="298"/>
-            <ac:spMk id="2" creationId="{00000000-0000-0000-0000-000000000000}"/>
+            <pc:sldMk cId="0" sldId="258"/>
+            <ac:spMk id="104" creationId="{00000000-0000-0000-0000-000000000000}"/>
           </ac:spMkLst>
         </pc:spChg>
       </pc:sldChg>
-      <pc:sldChg chg="modSp add del mod">
-        <pc:chgData name="diagramador@aprovasim.com" userId="08c27f4fd777aeb1" providerId="LiveId" clId="{6DA82D89-F719-4B18-ABAA-0D43E56AF532}" dt="2026-02-09T13:46:34.709" v="60" actId="20577"/>
+      <pc:sldChg chg="modSp mod">
+        <pc:chgData name="diagramador@aprovasim.com" userId="08c27f4fd777aeb1" providerId="LiveId" clId="{6DA82D89-F719-4B18-ABAA-0D43E56AF532}" dt="2026-07-01T18:21:45.549" v="1298" actId="113"/>
         <pc:sldMkLst>
           <pc:docMk/>
-          <pc:sldMk cId="2415158352" sldId="302"/>
+          <pc:sldMk cId="2176294315" sldId="291"/>
         </pc:sldMkLst>
         <pc:spChg chg="mod">
-          <ac:chgData name="diagramador@aprovasim.com" userId="08c27f4fd777aeb1" providerId="LiveId" clId="{6DA82D89-F719-4B18-ABAA-0D43E56AF532}" dt="2026-02-09T13:46:34.709" v="60" actId="20577"/>
+          <ac:chgData name="diagramador@aprovasim.com" userId="08c27f4fd777aeb1" providerId="LiveId" clId="{6DA82D89-F719-4B18-ABAA-0D43E56AF532}" dt="2026-07-01T18:21:45.549" v="1298" actId="113"/>
           <ac:spMkLst>
             <pc:docMk/>
-            <pc:sldMk cId="2415158352" sldId="302"/>
+            <pc:sldMk cId="2176294315" sldId="291"/>
             <ac:spMk id="2" creationId="{00000000-0000-0000-0000-000000000000}"/>
           </ac:spMkLst>
         </pc:spChg>
       </pc:sldChg>
       <pc:sldChg chg="modSp mod">
-        <pc:chgData name="diagramador@aprovasim.com" userId="08c27f4fd777aeb1" providerId="LiveId" clId="{6DA82D89-F719-4B18-ABAA-0D43E56AF532}" dt="2026-02-09T13:50:01.227" v="111" actId="114"/>
+        <pc:chgData name="diagramador@aprovasim.com" userId="08c27f4fd777aeb1" providerId="LiveId" clId="{6DA82D89-F719-4B18-ABAA-0D43E56AF532}" dt="2026-07-01T17:16:32.689" v="596" actId="255"/>
         <pc:sldMkLst>
           <pc:docMk/>
-          <pc:sldMk cId="2288660240" sldId="303"/>
+          <pc:sldMk cId="2155793808" sldId="346"/>
         </pc:sldMkLst>
         <pc:spChg chg="mod">
-          <ac:chgData name="diagramador@aprovasim.com" userId="08c27f4fd777aeb1" providerId="LiveId" clId="{6DA82D89-F719-4B18-ABAA-0D43E56AF532}" dt="2026-02-09T13:50:01.227" v="111" actId="114"/>
+          <ac:chgData name="diagramador@aprovasim.com" userId="08c27f4fd777aeb1" providerId="LiveId" clId="{6DA82D89-F719-4B18-ABAA-0D43E56AF532}" dt="2026-07-01T17:16:32.689" v="596" actId="255"/>
           <ac:spMkLst>
             <pc:docMk/>
-            <pc:sldMk cId="2288660240" sldId="303"/>
-            <ac:spMk id="2" creationId="{00000000-0000-0000-0000-000000000000}"/>
+            <pc:sldMk cId="2155793808" sldId="346"/>
+            <ac:spMk id="4" creationId="{00000000-0000-0000-0000-000000000000}"/>
+          </ac:spMkLst>
+        </pc:spChg>
+      </pc:sldChg>
+      <pc:sldChg chg="delSp modSp mod">
+        <pc:chgData name="diagramador@aprovasim.com" userId="08c27f4fd777aeb1" providerId="LiveId" clId="{6DA82D89-F719-4B18-ABAA-0D43E56AF532}" dt="2026-07-01T18:21:42.378" v="1297" actId="113"/>
+        <pc:sldMkLst>
+          <pc:docMk/>
+          <pc:sldMk cId="2593181943" sldId="347"/>
+        </pc:sldMkLst>
+        <pc:spChg chg="mod">
+          <ac:chgData name="diagramador@aprovasim.com" userId="08c27f4fd777aeb1" providerId="LiveId" clId="{6DA82D89-F719-4B18-ABAA-0D43E56AF532}" dt="2026-07-01T18:21:42.378" v="1297" actId="113"/>
+          <ac:spMkLst>
+            <pc:docMk/>
+            <pc:sldMk cId="2593181943" sldId="347"/>
+            <ac:spMk id="2" creationId="{0E9A851E-AC82-14B8-ED91-99B52512CAF0}"/>
+          </ac:spMkLst>
+        </pc:spChg>
+      </pc:sldChg>
+      <pc:sldChg chg="modSp del mod">
+        <pc:chgData name="diagramador@aprovasim.com" userId="08c27f4fd777aeb1" providerId="LiveId" clId="{6DA82D89-F719-4B18-ABAA-0D43E56AF532}" dt="2026-07-01T17:20:29.121" v="620" actId="47"/>
+        <pc:sldMkLst>
+          <pc:docMk/>
+          <pc:sldMk cId="334342296" sldId="348"/>
+        </pc:sldMkLst>
+      </pc:sldChg>
+      <pc:sldChg chg="modSp mod">
+        <pc:chgData name="diagramador@aprovasim.com" userId="08c27f4fd777aeb1" providerId="LiveId" clId="{6DA82D89-F719-4B18-ABAA-0D43E56AF532}" dt="2026-07-01T18:21:38.785" v="1296" actId="113"/>
+        <pc:sldMkLst>
+          <pc:docMk/>
+          <pc:sldMk cId="1036295510" sldId="349"/>
+        </pc:sldMkLst>
+        <pc:spChg chg="mod">
+          <ac:chgData name="diagramador@aprovasim.com" userId="08c27f4fd777aeb1" providerId="LiveId" clId="{6DA82D89-F719-4B18-ABAA-0D43E56AF532}" dt="2026-07-01T18:21:38.785" v="1296" actId="113"/>
+          <ac:spMkLst>
+            <pc:docMk/>
+            <pc:sldMk cId="1036295510" sldId="349"/>
+            <ac:spMk id="2" creationId="{AA318B19-E15A-6CEC-E150-039F7361ED23}"/>
           </ac:spMkLst>
         </pc:spChg>
       </pc:sldChg>
       <pc:sldChg chg="modSp mod">
-        <pc:chgData name="diagramador@aprovasim.com" userId="08c27f4fd777aeb1" providerId="LiveId" clId="{6DA82D89-F719-4B18-ABAA-0D43E56AF532}" dt="2026-02-09T13:52:00.662" v="118" actId="20577"/>
+        <pc:chgData name="diagramador@aprovasim.com" userId="08c27f4fd777aeb1" providerId="LiveId" clId="{6DA82D89-F719-4B18-ABAA-0D43E56AF532}" dt="2026-07-01T17:24:23.261" v="671" actId="20577"/>
         <pc:sldMkLst>
           <pc:docMk/>
-          <pc:sldMk cId="3003624153" sldId="313"/>
+          <pc:sldMk cId="1350232776" sldId="350"/>
         </pc:sldMkLst>
         <pc:spChg chg="mod">
-          <ac:chgData name="diagramador@aprovasim.com" userId="08c27f4fd777aeb1" providerId="LiveId" clId="{6DA82D89-F719-4B18-ABAA-0D43E56AF532}" dt="2026-02-09T13:52:00.662" v="118" actId="20577"/>
+          <ac:chgData name="diagramador@aprovasim.com" userId="08c27f4fd777aeb1" providerId="LiveId" clId="{6DA82D89-F719-4B18-ABAA-0D43E56AF532}" dt="2026-07-01T17:24:23.261" v="671" actId="20577"/>
           <ac:spMkLst>
             <pc:docMk/>
-            <pc:sldMk cId="3003624153" sldId="313"/>
-            <ac:spMk id="2" creationId="{00000000-0000-0000-0000-000000000000}"/>
+            <pc:sldMk cId="1350232776" sldId="350"/>
+            <ac:spMk id="4" creationId="{B9F821AD-8209-74B5-1BF5-51AF690D80EA}"/>
           </ac:spMkLst>
         </pc:spChg>
       </pc:sldChg>
       <pc:sldChg chg="modSp mod">
-        <pc:chgData name="diagramador@aprovasim.com" userId="08c27f4fd777aeb1" providerId="LiveId" clId="{6DA82D89-F719-4B18-ABAA-0D43E56AF532}" dt="2026-02-09T13:52:43.689" v="125" actId="20577"/>
+        <pc:chgData name="diagramador@aprovasim.com" userId="08c27f4fd777aeb1" providerId="LiveId" clId="{6DA82D89-F719-4B18-ABAA-0D43E56AF532}" dt="2026-07-01T17:49:19.917" v="800" actId="113"/>
         <pc:sldMkLst>
           <pc:docMk/>
-          <pc:sldMk cId="2636629807" sldId="314"/>
+          <pc:sldMk cId="1140742769" sldId="351"/>
         </pc:sldMkLst>
         <pc:spChg chg="mod">
-          <ac:chgData name="diagramador@aprovasim.com" userId="08c27f4fd777aeb1" providerId="LiveId" clId="{6DA82D89-F719-4B18-ABAA-0D43E56AF532}" dt="2026-02-09T13:52:43.689" v="125" actId="20577"/>
+          <ac:chgData name="diagramador@aprovasim.com" userId="08c27f4fd777aeb1" providerId="LiveId" clId="{6DA82D89-F719-4B18-ABAA-0D43E56AF532}" dt="2026-07-01T17:49:19.917" v="800" actId="113"/>
           <ac:spMkLst>
             <pc:docMk/>
-            <pc:sldMk cId="2636629807" sldId="314"/>
-            <ac:spMk id="2" creationId="{00000000-0000-0000-0000-000000000000}"/>
+            <pc:sldMk cId="1140742769" sldId="351"/>
+            <ac:spMk id="2" creationId="{9F93558D-B893-0122-7551-86C9C0C34045}"/>
+          </ac:spMkLst>
+        </pc:spChg>
+      </pc:sldChg>
+      <pc:sldChg chg="addSp delSp modSp mod modCm">
+        <pc:chgData name="diagramador@aprovasim.com" userId="08c27f4fd777aeb1" providerId="LiveId" clId="{6DA82D89-F719-4B18-ABAA-0D43E56AF532}" dt="2026-07-01T17:38:33.353" v="719" actId="20577"/>
+        <pc:sldMkLst>
+          <pc:docMk/>
+          <pc:sldMk cId="3104311057" sldId="352"/>
+        </pc:sldMkLst>
+        <pc:spChg chg="add del mod">
+          <ac:chgData name="diagramador@aprovasim.com" userId="08c27f4fd777aeb1" providerId="LiveId" clId="{6DA82D89-F719-4B18-ABAA-0D43E56AF532}" dt="2026-07-01T17:38:33.353" v="719" actId="20577"/>
+          <ac:spMkLst>
+            <pc:docMk/>
+            <pc:sldMk cId="3104311057" sldId="352"/>
+            <ac:spMk id="4" creationId="{4BBA00BD-568C-D6D3-0207-6E5CE1E18A5E}"/>
+          </ac:spMkLst>
+        </pc:spChg>
+        <pc:extLst>
+          <p:ext xmlns:p="http://schemas.openxmlformats.org/presentationml/2006/main" uri="{D6D511B9-2390-475A-947B-AFAB55BFBCF1}">
+            <pc226:cmChg xmlns:pc226="http://schemas.microsoft.com/office/powerpoint/2022/06/main/command" chg="mod">
+              <pc226:chgData name="diagramador@aprovasim.com" userId="08c27f4fd777aeb1" providerId="LiveId" clId="{6DA82D89-F719-4B18-ABAA-0D43E56AF532}" dt="2026-07-01T17:37:42.217" v="716" actId="478"/>
+              <pc2:cmMkLst xmlns:pc2="http://schemas.microsoft.com/office/powerpoint/2019/9/main/command">
+                <pc:docMk/>
+                <pc:sldMk cId="3104311057" sldId="352"/>
+                <pc2:cmMk id="{6354A394-061B-4BD8-B6C0-2622117CFAC1}"/>
+              </pc2:cmMkLst>
+            </pc226:cmChg>
+          </p:ext>
+        </pc:extLst>
+      </pc:sldChg>
+      <pc:sldChg chg="modSp mod">
+        <pc:chgData name="diagramador@aprovasim.com" userId="08c27f4fd777aeb1" providerId="LiveId" clId="{6DA82D89-F719-4B18-ABAA-0D43E56AF532}" dt="2026-07-01T17:49:16.688" v="799" actId="113"/>
+        <pc:sldMkLst>
+          <pc:docMk/>
+          <pc:sldMk cId="2836150108" sldId="353"/>
+        </pc:sldMkLst>
+        <pc:spChg chg="mod">
+          <ac:chgData name="diagramador@aprovasim.com" userId="08c27f4fd777aeb1" providerId="LiveId" clId="{6DA82D89-F719-4B18-ABAA-0D43E56AF532}" dt="2026-07-01T17:49:16.688" v="799" actId="113"/>
+          <ac:spMkLst>
+            <pc:docMk/>
+            <pc:sldMk cId="2836150108" sldId="353"/>
+            <ac:spMk id="2" creationId="{12C2015D-A6D8-6D1B-AE8E-D22EB173086A}"/>
+          </ac:spMkLst>
+        </pc:spChg>
+      </pc:sldChg>
+      <pc:sldChg chg="modSp mod">
+        <pc:chgData name="diagramador@aprovasim.com" userId="08c27f4fd777aeb1" providerId="LiveId" clId="{6DA82D89-F719-4B18-ABAA-0D43E56AF532}" dt="2026-07-01T17:50:25.527" v="821" actId="947"/>
+        <pc:sldMkLst>
+          <pc:docMk/>
+          <pc:sldMk cId="1355115418" sldId="354"/>
+        </pc:sldMkLst>
+        <pc:spChg chg="mod">
+          <ac:chgData name="diagramador@aprovasim.com" userId="08c27f4fd777aeb1" providerId="LiveId" clId="{6DA82D89-F719-4B18-ABAA-0D43E56AF532}" dt="2026-07-01T17:50:25.527" v="821" actId="947"/>
+          <ac:spMkLst>
+            <pc:docMk/>
+            <pc:sldMk cId="1355115418" sldId="354"/>
+            <ac:spMk id="4" creationId="{5107959D-F9D2-9F80-2215-DF750CB48322}"/>
           </ac:spMkLst>
         </pc:spChg>
       </pc:sldChg>
       <pc:sldChg chg="addSp delSp modSp mod">
-        <pc:chgData name="diagramador@aprovasim.com" userId="08c27f4fd777aeb1" providerId="LiveId" clId="{6DA82D89-F719-4B18-ABAA-0D43E56AF532}" dt="2026-02-09T13:55:48.295" v="153" actId="114"/>
+        <pc:chgData name="diagramador@aprovasim.com" userId="08c27f4fd777aeb1" providerId="LiveId" clId="{6DA82D89-F719-4B18-ABAA-0D43E56AF532}" dt="2026-07-02T12:24:25.179" v="1304" actId="313"/>
         <pc:sldMkLst>
           <pc:docMk/>
-          <pc:sldMk cId="2190814379" sldId="329"/>
+          <pc:sldMk cId="3494083821" sldId="355"/>
         </pc:sldMkLst>
         <pc:spChg chg="mod">
-          <ac:chgData name="diagramador@aprovasim.com" userId="08c27f4fd777aeb1" providerId="LiveId" clId="{6DA82D89-F719-4B18-ABAA-0D43E56AF532}" dt="2026-02-09T13:55:48.295" v="153" actId="114"/>
+          <ac:chgData name="diagramador@aprovasim.com" userId="08c27f4fd777aeb1" providerId="LiveId" clId="{6DA82D89-F719-4B18-ABAA-0D43E56AF532}" dt="2026-07-02T12:24:25.179" v="1304" actId="313"/>
           <ac:spMkLst>
             <pc:docMk/>
-            <pc:sldMk cId="2190814379" sldId="329"/>
-            <ac:spMk id="2" creationId="{00000000-0000-0000-0000-000000000000}"/>
+            <pc:sldMk cId="3494083821" sldId="355"/>
+            <ac:spMk id="2" creationId="{CE633A5A-6532-E865-EBC3-D8E71EA15179}"/>
+          </ac:spMkLst>
+        </pc:spChg>
+        <pc:picChg chg="add del mod">
+          <ac:chgData name="diagramador@aprovasim.com" userId="08c27f4fd777aeb1" providerId="LiveId" clId="{6DA82D89-F719-4B18-ABAA-0D43E56AF532}" dt="2026-07-01T17:47:20.450" v="742" actId="478"/>
+          <ac:picMkLst>
+            <pc:docMk/>
+            <pc:sldMk cId="3494083821" sldId="355"/>
+            <ac:picMk id="6" creationId="{9FEC5BFC-5F75-5DFF-8095-80F99C272FD2}"/>
+          </ac:picMkLst>
+        </pc:picChg>
+        <pc:picChg chg="add del mod">
+          <ac:chgData name="diagramador@aprovasim.com" userId="08c27f4fd777aeb1" providerId="LiveId" clId="{6DA82D89-F719-4B18-ABAA-0D43E56AF532}" dt="2026-07-01T17:47:20.880" v="743" actId="478"/>
+          <ac:picMkLst>
+            <pc:docMk/>
+            <pc:sldMk cId="3494083821" sldId="355"/>
+            <ac:picMk id="8" creationId="{96F52FBB-A248-9C8A-FC29-B219D220E864}"/>
+          </ac:picMkLst>
+        </pc:picChg>
+        <pc:picChg chg="add del mod">
+          <ac:chgData name="diagramador@aprovasim.com" userId="08c27f4fd777aeb1" providerId="LiveId" clId="{6DA82D89-F719-4B18-ABAA-0D43E56AF532}" dt="2026-07-01T17:47:21.297" v="744" actId="478"/>
+          <ac:picMkLst>
+            <pc:docMk/>
+            <pc:sldMk cId="3494083821" sldId="355"/>
+            <ac:picMk id="10" creationId="{24637A13-6F31-EE90-3012-C079431BD021}"/>
+          </ac:picMkLst>
+        </pc:picChg>
+        <pc:picChg chg="add del mod">
+          <ac:chgData name="diagramador@aprovasim.com" userId="08c27f4fd777aeb1" providerId="LiveId" clId="{6DA82D89-F719-4B18-ABAA-0D43E56AF532}" dt="2026-07-01T17:47:21.677" v="745" actId="478"/>
+          <ac:picMkLst>
+            <pc:docMk/>
+            <pc:sldMk cId="3494083821" sldId="355"/>
+            <ac:picMk id="12" creationId="{45B5EB4B-65D4-0105-6ABE-EA9A7F4D3139}"/>
+          </ac:picMkLst>
+        </pc:picChg>
+        <pc:picChg chg="add del mod">
+          <ac:chgData name="diagramador@aprovasim.com" userId="08c27f4fd777aeb1" providerId="LiveId" clId="{6DA82D89-F719-4B18-ABAA-0D43E56AF532}" dt="2026-07-01T17:47:21.967" v="746" actId="478"/>
+          <ac:picMkLst>
+            <pc:docMk/>
+            <pc:sldMk cId="3494083821" sldId="355"/>
+            <ac:picMk id="14" creationId="{4F9D97C6-0F55-73C4-03BC-3217F7B694E4}"/>
+          </ac:picMkLst>
+        </pc:picChg>
+      </pc:sldChg>
+      <pc:sldChg chg="modSp mod">
+        <pc:chgData name="diagramador@aprovasim.com" userId="08c27f4fd777aeb1" providerId="LiveId" clId="{6DA82D89-F719-4B18-ABAA-0D43E56AF532}" dt="2026-07-01T17:50:15.347" v="819" actId="947"/>
+        <pc:sldMkLst>
+          <pc:docMk/>
+          <pc:sldMk cId="630176912" sldId="356"/>
+        </pc:sldMkLst>
+        <pc:spChg chg="mod">
+          <ac:chgData name="diagramador@aprovasim.com" userId="08c27f4fd777aeb1" providerId="LiveId" clId="{6DA82D89-F719-4B18-ABAA-0D43E56AF532}" dt="2026-07-01T17:50:15.347" v="819" actId="947"/>
+          <ac:spMkLst>
+            <pc:docMk/>
+            <pc:sldMk cId="630176912" sldId="356"/>
+            <ac:spMk id="4" creationId="{77CB037C-364B-D9C4-AAD5-C094AD3FCCD4}"/>
+          </ac:spMkLst>
+        </pc:spChg>
+      </pc:sldChg>
+      <pc:sldChg chg="addSp delSp modSp mod">
+        <pc:chgData name="diagramador@aprovasim.com" userId="08c27f4fd777aeb1" providerId="LiveId" clId="{6DA82D89-F719-4B18-ABAA-0D43E56AF532}" dt="2026-07-01T17:49:08.477" v="797" actId="113"/>
+        <pc:sldMkLst>
+          <pc:docMk/>
+          <pc:sldMk cId="3018354947" sldId="471"/>
+        </pc:sldMkLst>
+        <pc:spChg chg="mod">
+          <ac:chgData name="diagramador@aprovasim.com" userId="08c27f4fd777aeb1" providerId="LiveId" clId="{6DA82D89-F719-4B18-ABAA-0D43E56AF532}" dt="2026-07-01T17:49:08.477" v="797" actId="113"/>
+          <ac:spMkLst>
+            <pc:docMk/>
+            <pc:sldMk cId="3018354947" sldId="471"/>
+            <ac:spMk id="2" creationId="{E892977A-BF95-8F16-AF64-C412C9C186A3}"/>
+          </ac:spMkLst>
+        </pc:spChg>
+        <pc:picChg chg="add del mod">
+          <ac:chgData name="diagramador@aprovasim.com" userId="08c27f4fd777aeb1" providerId="LiveId" clId="{6DA82D89-F719-4B18-ABAA-0D43E56AF532}" dt="2026-07-01T17:48:30.217" v="780" actId="478"/>
+          <ac:picMkLst>
+            <pc:docMk/>
+            <pc:sldMk cId="3018354947" sldId="471"/>
+            <ac:picMk id="4" creationId="{C8F4A82D-5F32-9594-5839-57CE7A5DFF54}"/>
+          </ac:picMkLst>
+        </pc:picChg>
+      </pc:sldChg>
+      <pc:sldChg chg="modSp mod">
+        <pc:chgData name="diagramador@aprovasim.com" userId="08c27f4fd777aeb1" providerId="LiveId" clId="{6DA82D89-F719-4B18-ABAA-0D43E56AF532}" dt="2026-07-01T17:50:05.228" v="816" actId="20577"/>
+        <pc:sldMkLst>
+          <pc:docMk/>
+          <pc:sldMk cId="2253870745" sldId="472"/>
+        </pc:sldMkLst>
+        <pc:spChg chg="mod">
+          <ac:chgData name="diagramador@aprovasim.com" userId="08c27f4fd777aeb1" providerId="LiveId" clId="{6DA82D89-F719-4B18-ABAA-0D43E56AF532}" dt="2026-07-01T17:50:05.228" v="816" actId="20577"/>
+          <ac:spMkLst>
+            <pc:docMk/>
+            <pc:sldMk cId="2253870745" sldId="472"/>
+            <ac:spMk id="4" creationId="{700AFBBD-3C92-CEB5-BDF8-8C1C8A685A39}"/>
           </ac:spMkLst>
         </pc:spChg>
       </pc:sldChg>
       <pc:sldChg chg="modSp mod">
-        <pc:chgData name="diagramador@aprovasim.com" userId="08c27f4fd777aeb1" providerId="LiveId" clId="{6DA82D89-F719-4B18-ABAA-0D43E56AF532}" dt="2026-02-09T13:56:59.643" v="175" actId="948"/>
+        <pc:chgData name="diagramador@aprovasim.com" userId="08c27f4fd777aeb1" providerId="LiveId" clId="{6DA82D89-F719-4B18-ABAA-0D43E56AF532}" dt="2026-07-01T18:21:31.771" v="1295" actId="113"/>
         <pc:sldMkLst>
           <pc:docMk/>
-          <pc:sldMk cId="622189829" sldId="330"/>
+          <pc:sldMk cId="3316212990" sldId="473"/>
         </pc:sldMkLst>
         <pc:spChg chg="mod">
-          <ac:chgData name="diagramador@aprovasim.com" userId="08c27f4fd777aeb1" providerId="LiveId" clId="{6DA82D89-F719-4B18-ABAA-0D43E56AF532}" dt="2026-02-09T13:56:59.643" v="175" actId="948"/>
+          <ac:chgData name="diagramador@aprovasim.com" userId="08c27f4fd777aeb1" providerId="LiveId" clId="{6DA82D89-F719-4B18-ABAA-0D43E56AF532}" dt="2026-07-01T18:21:31.771" v="1295" actId="113"/>
           <ac:spMkLst>
             <pc:docMk/>
-            <pc:sldMk cId="622189829" sldId="330"/>
-            <ac:spMk id="2" creationId="{00000000-0000-0000-0000-000000000000}"/>
+            <pc:sldMk cId="3316212990" sldId="473"/>
+            <ac:spMk id="2" creationId="{74E4FE85-7102-9B5B-F257-BAC352EEF7B4}"/>
           </ac:spMkLst>
         </pc:spChg>
       </pc:sldChg>
       <pc:sldChg chg="modSp mod">
-        <pc:chgData name="diagramador@aprovasim.com" userId="08c27f4fd777aeb1" providerId="LiveId" clId="{6DA82D89-F719-4B18-ABAA-0D43E56AF532}" dt="2026-02-09T13:59:32.377" v="195" actId="20577"/>
+        <pc:chgData name="diagramador@aprovasim.com" userId="08c27f4fd777aeb1" providerId="LiveId" clId="{6DA82D89-F719-4B18-ABAA-0D43E56AF532}" dt="2026-07-01T17:59:10.259" v="868" actId="114"/>
         <pc:sldMkLst>
           <pc:docMk/>
-          <pc:sldMk cId="1198543999" sldId="337"/>
+          <pc:sldMk cId="1871355218" sldId="474"/>
         </pc:sldMkLst>
         <pc:spChg chg="mod">
-          <ac:chgData name="diagramador@aprovasim.com" userId="08c27f4fd777aeb1" providerId="LiveId" clId="{6DA82D89-F719-4B18-ABAA-0D43E56AF532}" dt="2026-02-09T13:59:32.377" v="195" actId="20577"/>
+          <ac:chgData name="diagramador@aprovasim.com" userId="08c27f4fd777aeb1" providerId="LiveId" clId="{6DA82D89-F719-4B18-ABAA-0D43E56AF532}" dt="2026-07-01T17:59:10.259" v="868" actId="114"/>
           <ac:spMkLst>
             <pc:docMk/>
-            <pc:sldMk cId="1198543999" sldId="337"/>
-            <ac:spMk id="2" creationId="{00000000-0000-0000-0000-000000000000}"/>
+            <pc:sldMk cId="1871355218" sldId="474"/>
+            <ac:spMk id="4" creationId="{3A741841-FA53-EC69-96D1-55BFB67FA374}"/>
           </ac:spMkLst>
         </pc:spChg>
       </pc:sldChg>
       <pc:sldChg chg="modSp mod">
-        <pc:chgData name="diagramador@aprovasim.com" userId="08c27f4fd777aeb1" providerId="LiveId" clId="{6DA82D89-F719-4B18-ABAA-0D43E56AF532}" dt="2026-02-09T14:00:06.577" v="203" actId="20577"/>
+        <pc:chgData name="diagramador@aprovasim.com" userId="08c27f4fd777aeb1" providerId="LiveId" clId="{6DA82D89-F719-4B18-ABAA-0D43E56AF532}" dt="2026-07-01T18:21:28.272" v="1294" actId="113"/>
         <pc:sldMkLst>
           <pc:docMk/>
-          <pc:sldMk cId="2529176264" sldId="338"/>
+          <pc:sldMk cId="3855689532" sldId="475"/>
         </pc:sldMkLst>
         <pc:spChg chg="mod">
-          <ac:chgData name="diagramador@aprovasim.com" userId="08c27f4fd777aeb1" providerId="LiveId" clId="{6DA82D89-F719-4B18-ABAA-0D43E56AF532}" dt="2026-02-09T14:00:06.577" v="203" actId="20577"/>
+          <ac:chgData name="diagramador@aprovasim.com" userId="08c27f4fd777aeb1" providerId="LiveId" clId="{6DA82D89-F719-4B18-ABAA-0D43E56AF532}" dt="2026-07-01T18:21:28.272" v="1294" actId="113"/>
           <ac:spMkLst>
             <pc:docMk/>
-            <pc:sldMk cId="2529176264" sldId="338"/>
-            <ac:spMk id="2" creationId="{00000000-0000-0000-0000-000000000000}"/>
+            <pc:sldMk cId="3855689532" sldId="475"/>
+            <ac:spMk id="2" creationId="{182835B0-EF5C-6899-C172-E5EF52AEF583}"/>
           </ac:spMkLst>
         </pc:spChg>
       </pc:sldChg>
       <pc:sldChg chg="modSp mod">
-        <pc:chgData name="diagramador@aprovasim.com" userId="08c27f4fd777aeb1" providerId="LiveId" clId="{6DA82D89-F719-4B18-ABAA-0D43E56AF532}" dt="2026-02-09T14:00:45.457" v="205" actId="948"/>
+        <pc:chgData name="diagramador@aprovasim.com" userId="08c27f4fd777aeb1" providerId="LiveId" clId="{6DA82D89-F719-4B18-ABAA-0D43E56AF532}" dt="2026-07-01T18:05:02.773" v="900" actId="948"/>
         <pc:sldMkLst>
           <pc:docMk/>
-          <pc:sldMk cId="3973646611" sldId="339"/>
+          <pc:sldMk cId="3371201499" sldId="476"/>
         </pc:sldMkLst>
         <pc:spChg chg="mod">
-          <ac:chgData name="diagramador@aprovasim.com" userId="08c27f4fd777aeb1" providerId="LiveId" clId="{6DA82D89-F719-4B18-ABAA-0D43E56AF532}" dt="2026-02-09T14:00:45.457" v="205" actId="948"/>
+          <ac:chgData name="diagramador@aprovasim.com" userId="08c27f4fd777aeb1" providerId="LiveId" clId="{6DA82D89-F719-4B18-ABAA-0D43E56AF532}" dt="2026-07-01T18:05:02.773" v="900" actId="948"/>
           <ac:spMkLst>
             <pc:docMk/>
-            <pc:sldMk cId="3973646611" sldId="339"/>
-            <ac:spMk id="2" creationId="{00000000-0000-0000-0000-000000000000}"/>
+            <pc:sldMk cId="3371201499" sldId="476"/>
+            <ac:spMk id="4" creationId="{317E5782-9236-7C9B-1DE4-F64596DC81EA}"/>
           </ac:spMkLst>
         </pc:spChg>
       </pc:sldChg>
       <pc:sldChg chg="modSp mod">
-        <pc:chgData name="diagramador@aprovasim.com" userId="08c27f4fd777aeb1" providerId="LiveId" clId="{6DA82D89-F719-4B18-ABAA-0D43E56AF532}" dt="2026-02-09T14:05:03.812" v="225" actId="948"/>
+        <pc:chgData name="diagramador@aprovasim.com" userId="08c27f4fd777aeb1" providerId="LiveId" clId="{6DA82D89-F719-4B18-ABAA-0D43E56AF532}" dt="2026-07-01T18:21:24.757" v="1293" actId="113"/>
         <pc:sldMkLst>
           <pc:docMk/>
-          <pc:sldMk cId="2946673051" sldId="351"/>
+          <pc:sldMk cId="487046337" sldId="477"/>
         </pc:sldMkLst>
         <pc:spChg chg="mod">
-          <ac:chgData name="diagramador@aprovasim.com" userId="08c27f4fd777aeb1" providerId="LiveId" clId="{6DA82D89-F719-4B18-ABAA-0D43E56AF532}" dt="2026-02-09T14:05:03.812" v="225" actId="948"/>
+          <ac:chgData name="diagramador@aprovasim.com" userId="08c27f4fd777aeb1" providerId="LiveId" clId="{6DA82D89-F719-4B18-ABAA-0D43E56AF532}" dt="2026-07-01T18:21:24.757" v="1293" actId="113"/>
           <ac:spMkLst>
             <pc:docMk/>
-            <pc:sldMk cId="2946673051" sldId="351"/>
-            <ac:spMk id="2" creationId="{00000000-0000-0000-0000-000000000000}"/>
+            <pc:sldMk cId="487046337" sldId="477"/>
+            <ac:spMk id="2" creationId="{569A36BF-D5AB-E6EA-2169-09C60E5F09E9}"/>
           </ac:spMkLst>
         </pc:spChg>
       </pc:sldChg>
       <pc:sldChg chg="modSp mod">
-        <pc:chgData name="diagramador@aprovasim.com" userId="08c27f4fd777aeb1" providerId="LiveId" clId="{6DA82D89-F719-4B18-ABAA-0D43E56AF532}" dt="2026-02-09T14:06:17.913" v="247" actId="948"/>
+        <pc:chgData name="diagramador@aprovasim.com" userId="08c27f4fd777aeb1" providerId="LiveId" clId="{6DA82D89-F719-4B18-ABAA-0D43E56AF532}" dt="2026-07-01T18:06:31.692" v="934" actId="20577"/>
         <pc:sldMkLst>
           <pc:docMk/>
-          <pc:sldMk cId="3402339889" sldId="352"/>
+          <pc:sldMk cId="92158623" sldId="478"/>
         </pc:sldMkLst>
         <pc:spChg chg="mod">
-          <ac:chgData name="diagramador@aprovasim.com" userId="08c27f4fd777aeb1" providerId="LiveId" clId="{6DA82D89-F719-4B18-ABAA-0D43E56AF532}" dt="2026-02-09T14:06:17.913" v="247" actId="948"/>
+          <ac:chgData name="diagramador@aprovasim.com" userId="08c27f4fd777aeb1" providerId="LiveId" clId="{6DA82D89-F719-4B18-ABAA-0D43E56AF532}" dt="2026-07-01T18:06:31.692" v="934" actId="20577"/>
           <ac:spMkLst>
             <pc:docMk/>
-            <pc:sldMk cId="3402339889" sldId="352"/>
-            <ac:spMk id="2" creationId="{00000000-0000-0000-0000-000000000000}"/>
-          </ac:spMkLst>
-        </pc:spChg>
-      </pc:sldChg>
-      <pc:sldChg chg="modSp mod">
-        <pc:chgData name="diagramador@aprovasim.com" userId="08c27f4fd777aeb1" providerId="LiveId" clId="{6DA82D89-F719-4B18-ABAA-0D43E56AF532}" dt="2026-02-09T14:13:55.231" v="292" actId="1076"/>
-        <pc:sldMkLst>
-          <pc:docMk/>
-          <pc:sldMk cId="525285836" sldId="379"/>
-        </pc:sldMkLst>
-        <pc:spChg chg="mod">
-          <ac:chgData name="diagramador@aprovasim.com" userId="08c27f4fd777aeb1" providerId="LiveId" clId="{6DA82D89-F719-4B18-ABAA-0D43E56AF532}" dt="2026-02-09T14:13:55.231" v="292" actId="1076"/>
-          <ac:spMkLst>
-            <pc:docMk/>
-            <pc:sldMk cId="525285836" sldId="379"/>
-            <ac:spMk id="2" creationId="{00000000-0000-0000-0000-000000000000}"/>
-          </ac:spMkLst>
-        </pc:spChg>
-      </pc:sldChg>
-      <pc:sldChg chg="modSp mod ord">
-        <pc:chgData name="diagramador@aprovasim.com" userId="08c27f4fd777aeb1" providerId="LiveId" clId="{6DA82D89-F719-4B18-ABAA-0D43E56AF532}" dt="2026-02-09T14:15:28.928" v="309" actId="947"/>
-        <pc:sldMkLst>
-          <pc:docMk/>
-          <pc:sldMk cId="3926144291" sldId="380"/>
-        </pc:sldMkLst>
-        <pc:spChg chg="mod">
-          <ac:chgData name="diagramador@aprovasim.com" userId="08c27f4fd777aeb1" providerId="LiveId" clId="{6DA82D89-F719-4B18-ABAA-0D43E56AF532}" dt="2026-02-09T14:15:28.928" v="309" actId="947"/>
-          <ac:spMkLst>
-            <pc:docMk/>
-            <pc:sldMk cId="3926144291" sldId="380"/>
-            <ac:spMk id="2" creationId="{00000000-0000-0000-0000-000000000000}"/>
-          </ac:spMkLst>
-        </pc:spChg>
-      </pc:sldChg>
-      <pc:sldChg chg="modSp mod">
-        <pc:chgData name="diagramador@aprovasim.com" userId="08c27f4fd777aeb1" providerId="LiveId" clId="{6DA82D89-F719-4B18-ABAA-0D43E56AF532}" dt="2026-02-09T14:18:54.892" v="348" actId="114"/>
-        <pc:sldMkLst>
-          <pc:docMk/>
-          <pc:sldMk cId="62179192" sldId="383"/>
-        </pc:sldMkLst>
-        <pc:spChg chg="mod">
-          <ac:chgData name="diagramador@aprovasim.com" userId="08c27f4fd777aeb1" providerId="LiveId" clId="{6DA82D89-F719-4B18-ABAA-0D43E56AF532}" dt="2026-02-09T14:18:54.892" v="348" actId="114"/>
-          <ac:spMkLst>
-            <pc:docMk/>
-            <pc:sldMk cId="62179192" sldId="383"/>
-            <ac:spMk id="2" creationId="{00000000-0000-0000-0000-000000000000}"/>
-          </ac:spMkLst>
-        </pc:spChg>
-      </pc:sldChg>
-      <pc:sldChg chg="modSp add del mod">
-        <pc:chgData name="diagramador@aprovasim.com" userId="08c27f4fd777aeb1" providerId="LiveId" clId="{6DA82D89-F719-4B18-ABAA-0D43E56AF532}" dt="2026-02-09T13:49:35.897" v="110" actId="948"/>
-        <pc:sldMkLst>
-          <pc:docMk/>
-          <pc:sldMk cId="2087489856" sldId="413"/>
-        </pc:sldMkLst>
-        <pc:spChg chg="mod">
-          <ac:chgData name="diagramador@aprovasim.com" userId="08c27f4fd777aeb1" providerId="LiveId" clId="{6DA82D89-F719-4B18-ABAA-0D43E56AF532}" dt="2026-02-09T13:49:35.897" v="110" actId="948"/>
-          <ac:spMkLst>
-            <pc:docMk/>
-            <pc:sldMk cId="2087489856" sldId="413"/>
-            <ac:spMk id="3" creationId="{2D7D79D5-3F87-90E3-2E57-DAD7CB35AD28}"/>
+            <pc:sldMk cId="92158623" sldId="478"/>
+            <ac:spMk id="4" creationId="{7BC39A0B-C91C-2E56-1708-ED017D238F12}"/>
           </ac:spMkLst>
         </pc:spChg>
       </pc:sldChg>
       <pc:sldChg chg="modSp add mod">
-        <pc:chgData name="diagramador@aprovasim.com" userId="08c27f4fd777aeb1" providerId="LiveId" clId="{6DA82D89-F719-4B18-ABAA-0D43E56AF532}" dt="2026-02-09T13:42:00.953" v="27" actId="948"/>
+        <pc:chgData name="diagramador@aprovasim.com" userId="08c27f4fd777aeb1" providerId="LiveId" clId="{6DA82D89-F719-4B18-ABAA-0D43E56AF532}" dt="2026-07-01T17:21:28.184" v="631" actId="20577"/>
         <pc:sldMkLst>
           <pc:docMk/>
-          <pc:sldMk cId="1885894788" sldId="438"/>
+          <pc:sldMk cId="2585423566" sldId="479"/>
         </pc:sldMkLst>
         <pc:spChg chg="mod">
-          <ac:chgData name="diagramador@aprovasim.com" userId="08c27f4fd777aeb1" providerId="LiveId" clId="{6DA82D89-F719-4B18-ABAA-0D43E56AF532}" dt="2026-02-09T13:42:00.953" v="27" actId="948"/>
+          <ac:chgData name="diagramador@aprovasim.com" userId="08c27f4fd777aeb1" providerId="LiveId" clId="{6DA82D89-F719-4B18-ABAA-0D43E56AF532}" dt="2026-07-01T17:21:28.184" v="631" actId="20577"/>
           <ac:spMkLst>
             <pc:docMk/>
-            <pc:sldMk cId="1885894788" sldId="438"/>
-            <ac:spMk id="2" creationId="{032E3546-7A9D-ADAA-67D4-5466FB63891F}"/>
+            <pc:sldMk cId="2585423566" sldId="479"/>
+            <ac:spMk id="4" creationId="{A8CA74AD-2BED-A974-9D0B-0BBBEE04A478}"/>
+          </ac:spMkLst>
+        </pc:spChg>
+      </pc:sldChg>
+      <pc:sldChg chg="modSp add mod ord">
+        <pc:chgData name="diagramador@aprovasim.com" userId="08c27f4fd777aeb1" providerId="LiveId" clId="{6DA82D89-F719-4B18-ABAA-0D43E56AF532}" dt="2026-07-01T18:08:31.558" v="960"/>
+        <pc:sldMkLst>
+          <pc:docMk/>
+          <pc:sldMk cId="2665816227" sldId="480"/>
+        </pc:sldMkLst>
+        <pc:spChg chg="mod">
+          <ac:chgData name="diagramador@aprovasim.com" userId="08c27f4fd777aeb1" providerId="LiveId" clId="{6DA82D89-F719-4B18-ABAA-0D43E56AF532}" dt="2026-07-01T18:08:31.558" v="960"/>
+          <ac:spMkLst>
+            <pc:docMk/>
+            <pc:sldMk cId="2665816227" sldId="480"/>
+            <ac:spMk id="2" creationId="{FAD3029F-0910-61AE-323B-45014E0CCB7F}"/>
           </ac:spMkLst>
         </pc:spChg>
       </pc:sldChg>
       <pc:sldChg chg="modSp add mod">
-        <pc:chgData name="diagramador@aprovasim.com" userId="08c27f4fd777aeb1" providerId="LiveId" clId="{6DA82D89-F719-4B18-ABAA-0D43E56AF532}" dt="2026-02-09T13:44:19.152" v="43" actId="948"/>
+        <pc:chgData name="diagramador@aprovasim.com" userId="08c27f4fd777aeb1" providerId="LiveId" clId="{6DA82D89-F719-4B18-ABAA-0D43E56AF532}" dt="2026-07-01T18:09:45.057" v="1000" actId="113"/>
         <pc:sldMkLst>
           <pc:docMk/>
-          <pc:sldMk cId="4290838133" sldId="439"/>
+          <pc:sldMk cId="3472007341" sldId="481"/>
         </pc:sldMkLst>
         <pc:spChg chg="mod">
-          <ac:chgData name="diagramador@aprovasim.com" userId="08c27f4fd777aeb1" providerId="LiveId" clId="{6DA82D89-F719-4B18-ABAA-0D43E56AF532}" dt="2026-02-09T13:44:19.152" v="43" actId="948"/>
+          <ac:chgData name="diagramador@aprovasim.com" userId="08c27f4fd777aeb1" providerId="LiveId" clId="{6DA82D89-F719-4B18-ABAA-0D43E56AF532}" dt="2026-07-01T18:09:45.057" v="1000" actId="113"/>
           <ac:spMkLst>
             <pc:docMk/>
-            <pc:sldMk cId="4290838133" sldId="439"/>
-            <ac:spMk id="2" creationId="{3E2D8AAA-1BCD-62EF-9070-A3E0FF759D93}"/>
+            <pc:sldMk cId="3472007341" sldId="481"/>
+            <ac:spMk id="2" creationId="{62F47D21-9BD3-54C8-104A-9240732D9415}"/>
           </ac:spMkLst>
         </pc:spChg>
       </pc:sldChg>
       <pc:sldChg chg="modSp add mod">
-        <pc:chgData name="diagramador@aprovasim.com" userId="08c27f4fd777aeb1" providerId="LiveId" clId="{6DA82D89-F719-4B18-ABAA-0D43E56AF532}" dt="2026-02-09T13:46:45.625" v="64" actId="948"/>
+        <pc:chgData name="diagramador@aprovasim.com" userId="08c27f4fd777aeb1" providerId="LiveId" clId="{6DA82D89-F719-4B18-ABAA-0D43E56AF532}" dt="2026-07-02T12:27:27.480" v="1333" actId="113"/>
         <pc:sldMkLst>
           <pc:docMk/>
-          <pc:sldMk cId="4071443531" sldId="440"/>
+          <pc:sldMk cId="3967857948" sldId="482"/>
         </pc:sldMkLst>
         <pc:spChg chg="mod">
-          <ac:chgData name="diagramador@aprovasim.com" userId="08c27f4fd777aeb1" providerId="LiveId" clId="{6DA82D89-F719-4B18-ABAA-0D43E56AF532}" dt="2026-02-09T13:46:45.625" v="64" actId="948"/>
+          <ac:chgData name="diagramador@aprovasim.com" userId="08c27f4fd777aeb1" providerId="LiveId" clId="{6DA82D89-F719-4B18-ABAA-0D43E56AF532}" dt="2026-07-02T12:27:27.480" v="1333" actId="113"/>
           <ac:spMkLst>
             <pc:docMk/>
-            <pc:sldMk cId="4071443531" sldId="440"/>
-            <ac:spMk id="2" creationId="{74912613-E350-7453-7F29-5CA62A5E68A5}"/>
+            <pc:sldMk cId="3967857948" sldId="482"/>
+            <ac:spMk id="2" creationId="{FF6AF2F2-C47A-9095-3364-12C84B86D548}"/>
           </ac:spMkLst>
         </pc:spChg>
       </pc:sldChg>
       <pc:sldChg chg="modSp add mod">
-        <pc:chgData name="diagramador@aprovasim.com" userId="08c27f4fd777aeb1" providerId="LiveId" clId="{6DA82D89-F719-4B18-ABAA-0D43E56AF532}" dt="2026-02-09T13:49:23.247" v="108" actId="20577"/>
+        <pc:chgData name="diagramador@aprovasim.com" userId="08c27f4fd777aeb1" providerId="LiveId" clId="{6DA82D89-F719-4B18-ABAA-0D43E56AF532}" dt="2026-07-01T18:13:45.208" v="1113" actId="947"/>
         <pc:sldMkLst>
           <pc:docMk/>
-          <pc:sldMk cId="3802945718" sldId="441"/>
+          <pc:sldMk cId="3391944752" sldId="483"/>
         </pc:sldMkLst>
         <pc:spChg chg="mod">
-          <ac:chgData name="diagramador@aprovasim.com" userId="08c27f4fd777aeb1" providerId="LiveId" clId="{6DA82D89-F719-4B18-ABAA-0D43E56AF532}" dt="2026-02-09T13:49:23.247" v="108" actId="20577"/>
+          <ac:chgData name="diagramador@aprovasim.com" userId="08c27f4fd777aeb1" providerId="LiveId" clId="{6DA82D89-F719-4B18-ABAA-0D43E56AF532}" dt="2026-07-01T18:13:45.208" v="1113" actId="947"/>
           <ac:spMkLst>
             <pc:docMk/>
-            <pc:sldMk cId="3802945718" sldId="441"/>
-            <ac:spMk id="3" creationId="{8F1D92EF-322A-26EE-8248-49114A46FF8B}"/>
+            <pc:sldMk cId="3391944752" sldId="483"/>
+            <ac:spMk id="2" creationId="{065D751B-8BF1-5B6E-322E-4490F21BB6FE}"/>
           </ac:spMkLst>
         </pc:spChg>
       </pc:sldChg>
       <pc:sldChg chg="modSp add mod">
-        <pc:chgData name="diagramador@aprovasim.com" userId="08c27f4fd777aeb1" providerId="LiveId" clId="{6DA82D89-F719-4B18-ABAA-0D43E56AF532}" dt="2026-02-09T13:56:07.212" v="157" actId="20577"/>
+        <pc:chgData name="diagramador@aprovasim.com" userId="08c27f4fd777aeb1" providerId="LiveId" clId="{6DA82D89-F719-4B18-ABAA-0D43E56AF532}" dt="2026-07-01T18:14:55.105" v="1148" actId="113"/>
         <pc:sldMkLst>
           <pc:docMk/>
-          <pc:sldMk cId="867667429" sldId="442"/>
+          <pc:sldMk cId="242822726" sldId="484"/>
         </pc:sldMkLst>
         <pc:spChg chg="mod">
-          <ac:chgData name="diagramador@aprovasim.com" userId="08c27f4fd777aeb1" providerId="LiveId" clId="{6DA82D89-F719-4B18-ABAA-0D43E56AF532}" dt="2026-02-09T13:56:07.212" v="157" actId="20577"/>
+          <ac:chgData name="diagramador@aprovasim.com" userId="08c27f4fd777aeb1" providerId="LiveId" clId="{6DA82D89-F719-4B18-ABAA-0D43E56AF532}" dt="2026-07-01T18:14:55.105" v="1148" actId="113"/>
           <ac:spMkLst>
             <pc:docMk/>
-            <pc:sldMk cId="867667429" sldId="442"/>
-            <ac:spMk id="2" creationId="{B5A31035-F6E4-7041-F58E-685071D4FCB7}"/>
+            <pc:sldMk cId="242822726" sldId="484"/>
+            <ac:spMk id="2" creationId="{014A23C5-DB9D-5D6A-33F0-09082FD8987B}"/>
           </ac:spMkLst>
         </pc:spChg>
       </pc:sldChg>
       <pc:sldChg chg="modSp add mod">
-        <pc:chgData name="diagramador@aprovasim.com" userId="08c27f4fd777aeb1" providerId="LiveId" clId="{6DA82D89-F719-4B18-ABAA-0D43E56AF532}" dt="2026-02-09T13:56:17.589" v="161" actId="948"/>
+        <pc:chgData name="diagramador@aprovasim.com" userId="08c27f4fd777aeb1" providerId="LiveId" clId="{6DA82D89-F719-4B18-ABAA-0D43E56AF532}" dt="2026-07-01T18:17:49.646" v="1200" actId="20577"/>
         <pc:sldMkLst>
           <pc:docMk/>
-          <pc:sldMk cId="1128473590" sldId="443"/>
+          <pc:sldMk cId="637999703" sldId="485"/>
         </pc:sldMkLst>
         <pc:spChg chg="mod">
-          <ac:chgData name="diagramador@aprovasim.com" userId="08c27f4fd777aeb1" providerId="LiveId" clId="{6DA82D89-F719-4B18-ABAA-0D43E56AF532}" dt="2026-02-09T13:56:17.589" v="161" actId="948"/>
+          <ac:chgData name="diagramador@aprovasim.com" userId="08c27f4fd777aeb1" providerId="LiveId" clId="{6DA82D89-F719-4B18-ABAA-0D43E56AF532}" dt="2026-07-01T18:17:49.646" v="1200" actId="20577"/>
           <ac:spMkLst>
             <pc:docMk/>
-            <pc:sldMk cId="1128473590" sldId="443"/>
-            <ac:spMk id="2" creationId="{AEFBE394-66F1-3BD9-7C99-2D89D0F08B29}"/>
+            <pc:sldMk cId="637999703" sldId="485"/>
+            <ac:spMk id="2" creationId="{7C633058-6241-01C6-89D2-3250B7C67791}"/>
           </ac:spMkLst>
         </pc:spChg>
       </pc:sldChg>
       <pc:sldChg chg="modSp add mod">
-        <pc:chgData name="diagramador@aprovasim.com" userId="08c27f4fd777aeb1" providerId="LiveId" clId="{6DA82D89-F719-4B18-ABAA-0D43E56AF532}" dt="2026-02-09T13:59:46.074" v="199" actId="948"/>
+        <pc:chgData name="diagramador@aprovasim.com" userId="08c27f4fd777aeb1" providerId="LiveId" clId="{6DA82D89-F719-4B18-ABAA-0D43E56AF532}" dt="2026-07-01T18:19:26.282" v="1248" actId="113"/>
         <pc:sldMkLst>
           <pc:docMk/>
-          <pc:sldMk cId="3159088328" sldId="444"/>
+          <pc:sldMk cId="3888127971" sldId="486"/>
         </pc:sldMkLst>
         <pc:spChg chg="mod">
-          <ac:chgData name="diagramador@aprovasim.com" userId="08c27f4fd777aeb1" providerId="LiveId" clId="{6DA82D89-F719-4B18-ABAA-0D43E56AF532}" dt="2026-02-09T13:59:46.074" v="199" actId="948"/>
+          <ac:chgData name="diagramador@aprovasim.com" userId="08c27f4fd777aeb1" providerId="LiveId" clId="{6DA82D89-F719-4B18-ABAA-0D43E56AF532}" dt="2026-07-01T18:19:26.282" v="1248" actId="113"/>
           <ac:spMkLst>
             <pc:docMk/>
-            <pc:sldMk cId="3159088328" sldId="444"/>
-            <ac:spMk id="2" creationId="{E955685D-5830-86ED-367C-4D033AADBF98}"/>
-          </ac:spMkLst>
-        </pc:spChg>
-      </pc:sldChg>
-      <pc:sldChg chg="modSp add mod ord">
-        <pc:chgData name="diagramador@aprovasim.com" userId="08c27f4fd777aeb1" providerId="LiveId" clId="{6DA82D89-F719-4B18-ABAA-0D43E56AF532}" dt="2026-02-09T14:08:30.586" v="265" actId="948"/>
-        <pc:sldMkLst>
-          <pc:docMk/>
-          <pc:sldMk cId="2035163690" sldId="445"/>
-        </pc:sldMkLst>
-        <pc:spChg chg="mod">
-          <ac:chgData name="diagramador@aprovasim.com" userId="08c27f4fd777aeb1" providerId="LiveId" clId="{6DA82D89-F719-4B18-ABAA-0D43E56AF532}" dt="2026-02-09T14:08:30.586" v="265" actId="948"/>
-          <ac:spMkLst>
-            <pc:docMk/>
-            <pc:sldMk cId="2035163690" sldId="445"/>
-            <ac:spMk id="2" creationId="{E4948994-E21D-B335-7840-DF46EE970F52}"/>
+            <pc:sldMk cId="3888127971" sldId="486"/>
+            <ac:spMk id="2" creationId="{18E7DB0E-3A45-58DF-CC10-F949CF3C6584}"/>
           </ac:spMkLst>
         </pc:spChg>
       </pc:sldChg>
       <pc:sldChg chg="modSp add mod">
-        <pc:chgData name="diagramador@aprovasim.com" userId="08c27f4fd777aeb1" providerId="LiveId" clId="{6DA82D89-F719-4B18-ABAA-0D43E56AF532}" dt="2026-02-09T14:08:59.837" v="270" actId="20577"/>
+        <pc:chgData name="diagramador@aprovasim.com" userId="08c27f4fd777aeb1" providerId="LiveId" clId="{6DA82D89-F719-4B18-ABAA-0D43E56AF532}" dt="2026-07-01T18:20:27.250" v="1281" actId="113"/>
         <pc:sldMkLst>
           <pc:docMk/>
-          <pc:sldMk cId="2133981900" sldId="446"/>
+          <pc:sldMk cId="836911206" sldId="487"/>
         </pc:sldMkLst>
         <pc:spChg chg="mod">
-          <ac:chgData name="diagramador@aprovasim.com" userId="08c27f4fd777aeb1" providerId="LiveId" clId="{6DA82D89-F719-4B18-ABAA-0D43E56AF532}" dt="2026-02-09T14:08:59.837" v="270" actId="20577"/>
+          <ac:chgData name="diagramador@aprovasim.com" userId="08c27f4fd777aeb1" providerId="LiveId" clId="{6DA82D89-F719-4B18-ABAA-0D43E56AF532}" dt="2026-07-01T18:20:27.250" v="1281" actId="113"/>
           <ac:spMkLst>
             <pc:docMk/>
-            <pc:sldMk cId="2133981900" sldId="446"/>
-            <ac:spMk id="2" creationId="{0811FA04-30D9-FCA8-6C30-6E73A90FE649}"/>
-          </ac:spMkLst>
-        </pc:spChg>
-      </pc:sldChg>
-      <pc:sldChg chg="modSp add mod ord">
-        <pc:chgData name="diagramador@aprovasim.com" userId="08c27f4fd777aeb1" providerId="LiveId" clId="{6DA82D89-F719-4B18-ABAA-0D43E56AF532}" dt="2026-02-09T14:10:09.145" v="284" actId="20577"/>
-        <pc:sldMkLst>
-          <pc:docMk/>
-          <pc:sldMk cId="1982663426" sldId="447"/>
-        </pc:sldMkLst>
-        <pc:spChg chg="mod">
-          <ac:chgData name="diagramador@aprovasim.com" userId="08c27f4fd777aeb1" providerId="LiveId" clId="{6DA82D89-F719-4B18-ABAA-0D43E56AF532}" dt="2026-02-09T14:10:09.145" v="284" actId="20577"/>
-          <ac:spMkLst>
-            <pc:docMk/>
-            <pc:sldMk cId="1982663426" sldId="447"/>
-            <ac:spMk id="2" creationId="{E02F01C1-BE1C-8926-AD7F-67BB835F71D0}"/>
+            <pc:sldMk cId="836911206" sldId="487"/>
+            <ac:spMk id="2" creationId="{DA2DC3F5-67BE-B9F2-B4FE-95B64C00B773}"/>
           </ac:spMkLst>
         </pc:spChg>
       </pc:sldChg>
       <pc:sldChg chg="modSp add mod">
-        <pc:chgData name="diagramador@aprovasim.com" userId="08c27f4fd777aeb1" providerId="LiveId" clId="{6DA82D89-F719-4B18-ABAA-0D43E56AF532}" dt="2026-02-09T14:16:38.330" v="320" actId="6549"/>
+        <pc:chgData name="diagramador@aprovasim.com" userId="08c27f4fd777aeb1" providerId="LiveId" clId="{6DA82D89-F719-4B18-ABAA-0D43E56AF532}" dt="2026-07-01T18:09:05.714" v="977" actId="114"/>
         <pc:sldMkLst>
           <pc:docMk/>
-          <pc:sldMk cId="3232028002" sldId="448"/>
+          <pc:sldMk cId="647096419" sldId="488"/>
         </pc:sldMkLst>
         <pc:spChg chg="mod">
-          <ac:chgData name="diagramador@aprovasim.com" userId="08c27f4fd777aeb1" providerId="LiveId" clId="{6DA82D89-F719-4B18-ABAA-0D43E56AF532}" dt="2026-02-09T14:16:38.330" v="320" actId="6549"/>
+          <ac:chgData name="diagramador@aprovasim.com" userId="08c27f4fd777aeb1" providerId="LiveId" clId="{6DA82D89-F719-4B18-ABAA-0D43E56AF532}" dt="2026-07-01T18:09:05.714" v="977" actId="114"/>
           <ac:spMkLst>
             <pc:docMk/>
-            <pc:sldMk cId="3232028002" sldId="448"/>
-            <ac:spMk id="2" creationId="{7E634200-DCE1-CCD5-3CB8-EA7F0D174B25}"/>
+            <pc:sldMk cId="647096419" sldId="488"/>
+            <ac:spMk id="4" creationId="{EE162F34-3D45-446D-FDBB-E2EBBA6AC436}"/>
           </ac:spMkLst>
         </pc:spChg>
       </pc:sldChg>
       <pc:sldChg chg="modSp add mod">
-        <pc:chgData name="diagramador@aprovasim.com" userId="08c27f4fd777aeb1" providerId="LiveId" clId="{6DA82D89-F719-4B18-ABAA-0D43E56AF532}" dt="2026-02-09T14:14:31.758" v="299" actId="947"/>
+        <pc:chgData name="diagramador@aprovasim.com" userId="08c27f4fd777aeb1" providerId="LiveId" clId="{6DA82D89-F719-4B18-ABAA-0D43E56AF532}" dt="2026-07-01T18:10:03.343" v="1011" actId="20577"/>
         <pc:sldMkLst>
           <pc:docMk/>
-          <pc:sldMk cId="878369096" sldId="449"/>
+          <pc:sldMk cId="1255468833" sldId="489"/>
         </pc:sldMkLst>
         <pc:spChg chg="mod">
-          <ac:chgData name="diagramador@aprovasim.com" userId="08c27f4fd777aeb1" providerId="LiveId" clId="{6DA82D89-F719-4B18-ABAA-0D43E56AF532}" dt="2026-02-09T14:14:31.758" v="299" actId="947"/>
+          <ac:chgData name="diagramador@aprovasim.com" userId="08c27f4fd777aeb1" providerId="LiveId" clId="{6DA82D89-F719-4B18-ABAA-0D43E56AF532}" dt="2026-07-01T18:10:03.343" v="1011" actId="20577"/>
           <ac:spMkLst>
             <pc:docMk/>
-            <pc:sldMk cId="878369096" sldId="449"/>
-            <ac:spMk id="2" creationId="{5DA6D50F-001E-E4FA-2F09-3B5AF012CDD5}"/>
-          </ac:spMkLst>
-        </pc:spChg>
-      </pc:sldChg>
-      <pc:sldChg chg="addSp delSp modSp add mod ord">
-        <pc:chgData name="diagramador@aprovasim.com" userId="08c27f4fd777aeb1" providerId="LiveId" clId="{6DA82D89-F719-4B18-ABAA-0D43E56AF532}" dt="2026-02-09T14:18:11.947" v="346" actId="948"/>
-        <pc:sldMkLst>
-          <pc:docMk/>
-          <pc:sldMk cId="1858986218" sldId="450"/>
-        </pc:sldMkLst>
-        <pc:spChg chg="mod">
-          <ac:chgData name="diagramador@aprovasim.com" userId="08c27f4fd777aeb1" providerId="LiveId" clId="{6DA82D89-F719-4B18-ABAA-0D43E56AF532}" dt="2026-02-09T14:18:11.947" v="346" actId="948"/>
-          <ac:spMkLst>
-            <pc:docMk/>
-            <pc:sldMk cId="1858986218" sldId="450"/>
-            <ac:spMk id="2" creationId="{01BB5C8D-253C-5BB8-8D8E-ADAC592869C2}"/>
-          </ac:spMkLst>
-        </pc:spChg>
-      </pc:sldChg>
-      <pc:sldChg chg="add">
-        <pc:chgData name="diagramador@aprovasim.com" userId="08c27f4fd777aeb1" providerId="LiveId" clId="{6DA82D89-F719-4B18-ABAA-0D43E56AF532}" dt="2026-02-09T14:15:35.893" v="310" actId="2890"/>
-        <pc:sldMkLst>
-          <pc:docMk/>
-          <pc:sldMk cId="4244426481" sldId="451"/>
-        </pc:sldMkLst>
-      </pc:sldChg>
-      <pc:sldChg chg="modSp add mod">
-        <pc:chgData name="diagramador@aprovasim.com" userId="08c27f4fd777aeb1" providerId="LiveId" clId="{6DA82D89-F719-4B18-ABAA-0D43E56AF532}" dt="2026-02-09T14:16:44.067" v="321" actId="6549"/>
-        <pc:sldMkLst>
-          <pc:docMk/>
-          <pc:sldMk cId="2791515048" sldId="452"/>
-        </pc:sldMkLst>
-        <pc:spChg chg="mod">
-          <ac:chgData name="diagramador@aprovasim.com" userId="08c27f4fd777aeb1" providerId="LiveId" clId="{6DA82D89-F719-4B18-ABAA-0D43E56AF532}" dt="2026-02-09T14:16:44.067" v="321" actId="6549"/>
-          <ac:spMkLst>
-            <pc:docMk/>
-            <pc:sldMk cId="2791515048" sldId="452"/>
-            <ac:spMk id="2" creationId="{F43E2661-4D2F-E02C-F041-E0935AE8D1EA}"/>
-          </ac:spMkLst>
-        </pc:spChg>
-      </pc:sldChg>
-      <pc:sldChg chg="add">
-        <pc:chgData name="diagramador@aprovasim.com" userId="08c27f4fd777aeb1" providerId="LiveId" clId="{6DA82D89-F719-4B18-ABAA-0D43E56AF532}" dt="2026-02-09T14:16:56.307" v="322" actId="2890"/>
-        <pc:sldMkLst>
-          <pc:docMk/>
-          <pc:sldMk cId="1153979724" sldId="453"/>
-        </pc:sldMkLst>
-      </pc:sldChg>
-      <pc:sldChg chg="modSp add mod">
-        <pc:chgData name="diagramador@aprovasim.com" userId="08c27f4fd777aeb1" providerId="LiveId" clId="{6DA82D89-F719-4B18-ABAA-0D43E56AF532}" dt="2026-02-09T14:18:05.811" v="345" actId="6549"/>
-        <pc:sldMkLst>
-          <pc:docMk/>
-          <pc:sldMk cId="3214467022" sldId="454"/>
-        </pc:sldMkLst>
-        <pc:spChg chg="mod">
-          <ac:chgData name="diagramador@aprovasim.com" userId="08c27f4fd777aeb1" providerId="LiveId" clId="{6DA82D89-F719-4B18-ABAA-0D43E56AF532}" dt="2026-02-09T14:18:05.811" v="345" actId="6549"/>
-          <ac:spMkLst>
-            <pc:docMk/>
-            <pc:sldMk cId="3214467022" sldId="454"/>
-            <ac:spMk id="2" creationId="{E51DA2B9-D655-70D3-9178-61888497A759}"/>
-          </ac:spMkLst>
-        </pc:spChg>
-      </pc:sldChg>
-      <pc:sldChg chg="modSp add mod ord">
-        <pc:chgData name="diagramador@aprovasim.com" userId="08c27f4fd777aeb1" providerId="LiveId" clId="{6DA82D89-F719-4B18-ABAA-0D43E56AF532}" dt="2026-02-09T14:20:14.070" v="356" actId="948"/>
-        <pc:sldMkLst>
-          <pc:docMk/>
-          <pc:sldMk cId="2482133480" sldId="455"/>
-        </pc:sldMkLst>
-        <pc:spChg chg="mod">
-          <ac:chgData name="diagramador@aprovasim.com" userId="08c27f4fd777aeb1" providerId="LiveId" clId="{6DA82D89-F719-4B18-ABAA-0D43E56AF532}" dt="2026-02-09T14:20:14.070" v="356" actId="948"/>
-          <ac:spMkLst>
-            <pc:docMk/>
-            <pc:sldMk cId="2482133480" sldId="455"/>
-            <ac:spMk id="2" creationId="{E12FFE2F-E0F7-7AB0-0337-378B7022B165}"/>
-          </ac:spMkLst>
-        </pc:spChg>
-      </pc:sldChg>
-      <pc:sldChg chg="modSp add mod ord">
-        <pc:chgData name="diagramador@aprovasim.com" userId="08c27f4fd777aeb1" providerId="LiveId" clId="{6DA82D89-F719-4B18-ABAA-0D43E56AF532}" dt="2026-02-09T14:20:37.034" v="362"/>
-        <pc:sldMkLst>
-          <pc:docMk/>
-          <pc:sldMk cId="2112259277" sldId="456"/>
-        </pc:sldMkLst>
-        <pc:spChg chg="mod">
-          <ac:chgData name="diagramador@aprovasim.com" userId="08c27f4fd777aeb1" providerId="LiveId" clId="{6DA82D89-F719-4B18-ABAA-0D43E56AF532}" dt="2026-02-09T14:20:37.034" v="362"/>
-          <ac:spMkLst>
-            <pc:docMk/>
-            <pc:sldMk cId="2112259277" sldId="456"/>
-            <ac:spMk id="2" creationId="{CD804020-A08D-F3F4-C5BF-DCA54FD42887}"/>
-          </ac:spMkLst>
-        </pc:spChg>
-      </pc:sldChg>
-      <pc:sldChg chg="addSp delSp modSp add mod ord">
-        <pc:chgData name="diagramador@aprovasim.com" userId="08c27f4fd777aeb1" providerId="LiveId" clId="{6DA82D89-F719-4B18-ABAA-0D43E56AF532}" dt="2026-02-09T14:26:56.715" v="455" actId="22"/>
-        <pc:sldMkLst>
-          <pc:docMk/>
-          <pc:sldMk cId="1131374603" sldId="457"/>
-        </pc:sldMkLst>
-        <pc:spChg chg="mod">
-          <ac:chgData name="diagramador@aprovasim.com" userId="08c27f4fd777aeb1" providerId="LiveId" clId="{6DA82D89-F719-4B18-ABAA-0D43E56AF532}" dt="2026-02-09T14:21:27.709" v="385" actId="20577"/>
-          <ac:spMkLst>
-            <pc:docMk/>
-            <pc:sldMk cId="1131374603" sldId="457"/>
-            <ac:spMk id="104" creationId="{EDD3D42A-D134-AFD1-9869-71EE0A8519EB}"/>
-          </ac:spMkLst>
-        </pc:spChg>
-      </pc:sldChg>
-      <pc:sldChg chg="modSp add mod ord">
-        <pc:chgData name="diagramador@aprovasim.com" userId="08c27f4fd777aeb1" providerId="LiveId" clId="{6DA82D89-F719-4B18-ABAA-0D43E56AF532}" dt="2026-02-09T14:22:11.903" v="396" actId="948"/>
-        <pc:sldMkLst>
-          <pc:docMk/>
-          <pc:sldMk cId="1886896489" sldId="458"/>
-        </pc:sldMkLst>
-        <pc:spChg chg="mod">
-          <ac:chgData name="diagramador@aprovasim.com" userId="08c27f4fd777aeb1" providerId="LiveId" clId="{6DA82D89-F719-4B18-ABAA-0D43E56AF532}" dt="2026-02-09T14:22:11.903" v="396" actId="948"/>
-          <ac:spMkLst>
-            <pc:docMk/>
-            <pc:sldMk cId="1886896489" sldId="458"/>
-            <ac:spMk id="2" creationId="{0046BD3F-2039-8DF8-93A6-F01758AF3BC9}"/>
+            <pc:sldMk cId="1255468833" sldId="489"/>
+            <ac:spMk id="4" creationId="{ABFB6F81-7826-9EB3-8DA3-502FAC91B9ED}"/>
           </ac:spMkLst>
         </pc:spChg>
       </pc:sldChg>
       <pc:sldChg chg="modSp add mod">
-        <pc:chgData name="diagramador@aprovasim.com" userId="08c27f4fd777aeb1" providerId="LiveId" clId="{6DA82D89-F719-4B18-ABAA-0D43E56AF532}" dt="2026-02-09T14:22:52.889" v="403" actId="948"/>
+        <pc:chgData name="diagramador@aprovasim.com" userId="08c27f4fd777aeb1" providerId="LiveId" clId="{6DA82D89-F719-4B18-ABAA-0D43E56AF532}" dt="2026-07-02T12:28:03.999" v="1340" actId="948"/>
         <pc:sldMkLst>
           <pc:docMk/>
-          <pc:sldMk cId="1205707948" sldId="459"/>
+          <pc:sldMk cId="1794271784" sldId="490"/>
         </pc:sldMkLst>
         <pc:spChg chg="mod">
-          <ac:chgData name="diagramador@aprovasim.com" userId="08c27f4fd777aeb1" providerId="LiveId" clId="{6DA82D89-F719-4B18-ABAA-0D43E56AF532}" dt="2026-02-09T14:22:52.889" v="403" actId="948"/>
+          <ac:chgData name="diagramador@aprovasim.com" userId="08c27f4fd777aeb1" providerId="LiveId" clId="{6DA82D89-F719-4B18-ABAA-0D43E56AF532}" dt="2026-07-02T12:28:03.999" v="1340" actId="948"/>
           <ac:spMkLst>
             <pc:docMk/>
-            <pc:sldMk cId="1205707948" sldId="459"/>
-            <ac:spMk id="2" creationId="{D44BBE16-9B6F-E054-BEAA-69FA21709ABD}"/>
+            <pc:sldMk cId="1794271784" sldId="490"/>
+            <ac:spMk id="4" creationId="{2739DCA2-CF82-1840-9DE2-EA3C8CC8A342}"/>
           </ac:spMkLst>
         </pc:spChg>
       </pc:sldChg>
       <pc:sldChg chg="modSp add mod">
-        <pc:chgData name="diagramador@aprovasim.com" userId="08c27f4fd777aeb1" providerId="LiveId" clId="{6DA82D89-F719-4B18-ABAA-0D43E56AF532}" dt="2026-02-09T14:23:10.401" v="406" actId="948"/>
+        <pc:chgData name="diagramador@aprovasim.com" userId="08c27f4fd777aeb1" providerId="LiveId" clId="{6DA82D89-F719-4B18-ABAA-0D43E56AF532}" dt="2026-07-01T18:14:11.847" v="1120" actId="20577"/>
         <pc:sldMkLst>
           <pc:docMk/>
-          <pc:sldMk cId="2135169031" sldId="460"/>
+          <pc:sldMk cId="1870436960" sldId="491"/>
         </pc:sldMkLst>
         <pc:spChg chg="mod">
-          <ac:chgData name="diagramador@aprovasim.com" userId="08c27f4fd777aeb1" providerId="LiveId" clId="{6DA82D89-F719-4B18-ABAA-0D43E56AF532}" dt="2026-02-09T14:23:10.401" v="406" actId="948"/>
+          <ac:chgData name="diagramador@aprovasim.com" userId="08c27f4fd777aeb1" providerId="LiveId" clId="{6DA82D89-F719-4B18-ABAA-0D43E56AF532}" dt="2026-07-01T18:14:11.847" v="1120" actId="20577"/>
           <ac:spMkLst>
             <pc:docMk/>
-            <pc:sldMk cId="2135169031" sldId="460"/>
-            <ac:spMk id="2" creationId="{1982D858-E4D7-ECF2-2250-C52C04727730}"/>
+            <pc:sldMk cId="1870436960" sldId="491"/>
+            <ac:spMk id="4" creationId="{F146023E-EBE5-C2F8-0BDD-F105F960A2FB}"/>
           </ac:spMkLst>
         </pc:spChg>
       </pc:sldChg>
       <pc:sldChg chg="modSp add mod">
-        <pc:chgData name="diagramador@aprovasim.com" userId="08c27f4fd777aeb1" providerId="LiveId" clId="{6DA82D89-F719-4B18-ABAA-0D43E56AF532}" dt="2026-02-09T14:24:01.495" v="417" actId="114"/>
+        <pc:chgData name="diagramador@aprovasim.com" userId="08c27f4fd777aeb1" providerId="LiveId" clId="{6DA82D89-F719-4B18-ABAA-0D43E56AF532}" dt="2026-07-02T12:28:50.590" v="1350" actId="948"/>
         <pc:sldMkLst>
           <pc:docMk/>
-          <pc:sldMk cId="279354019" sldId="461"/>
+          <pc:sldMk cId="459579337" sldId="492"/>
         </pc:sldMkLst>
         <pc:spChg chg="mod">
-          <ac:chgData name="diagramador@aprovasim.com" userId="08c27f4fd777aeb1" providerId="LiveId" clId="{6DA82D89-F719-4B18-ABAA-0D43E56AF532}" dt="2026-02-09T14:24:01.495" v="417" actId="114"/>
+          <ac:chgData name="diagramador@aprovasim.com" userId="08c27f4fd777aeb1" providerId="LiveId" clId="{6DA82D89-F719-4B18-ABAA-0D43E56AF532}" dt="2026-07-02T12:28:50.590" v="1350" actId="948"/>
           <ac:spMkLst>
             <pc:docMk/>
-            <pc:sldMk cId="279354019" sldId="461"/>
-            <ac:spMk id="2" creationId="{65F7D42D-AE87-8334-344D-FC50519B9523}"/>
+            <pc:sldMk cId="459579337" sldId="492"/>
+            <ac:spMk id="4" creationId="{CF3B03A9-E731-A9F4-2553-2EC1E6F01DD4}"/>
           </ac:spMkLst>
         </pc:spChg>
       </pc:sldChg>
       <pc:sldChg chg="modSp add mod">
-        <pc:chgData name="diagramador@aprovasim.com" userId="08c27f4fd777aeb1" providerId="LiveId" clId="{6DA82D89-F719-4B18-ABAA-0D43E56AF532}" dt="2026-02-09T14:25:12.077" v="435" actId="114"/>
+        <pc:chgData name="diagramador@aprovasim.com" userId="08c27f4fd777aeb1" providerId="LiveId" clId="{6DA82D89-F719-4B18-ABAA-0D43E56AF532}" dt="2026-07-01T18:18:30.330" v="1214" actId="947"/>
         <pc:sldMkLst>
           <pc:docMk/>
-          <pc:sldMk cId="1658908859" sldId="462"/>
+          <pc:sldMk cId="4221201989" sldId="493"/>
         </pc:sldMkLst>
         <pc:spChg chg="mod">
-          <ac:chgData name="diagramador@aprovasim.com" userId="08c27f4fd777aeb1" providerId="LiveId" clId="{6DA82D89-F719-4B18-ABAA-0D43E56AF532}" dt="2026-02-09T14:25:12.077" v="435" actId="114"/>
+          <ac:chgData name="diagramador@aprovasim.com" userId="08c27f4fd777aeb1" providerId="LiveId" clId="{6DA82D89-F719-4B18-ABAA-0D43E56AF532}" dt="2026-07-01T18:18:30.330" v="1214" actId="947"/>
           <ac:spMkLst>
             <pc:docMk/>
-            <pc:sldMk cId="1658908859" sldId="462"/>
-            <ac:spMk id="2" creationId="{1F2F20C5-D953-14E0-4B56-6944192BD8C1}"/>
-          </ac:spMkLst>
-        </pc:spChg>
-      </pc:sldChg>
-      <pc:sldChg chg="modSp add mod ord">
-        <pc:chgData name="diagramador@aprovasim.com" userId="08c27f4fd777aeb1" providerId="LiveId" clId="{6DA82D89-F719-4B18-ABAA-0D43E56AF532}" dt="2026-02-09T14:25:03.632" v="433" actId="114"/>
-        <pc:sldMkLst>
-          <pc:docMk/>
-          <pc:sldMk cId="428462983" sldId="463"/>
-        </pc:sldMkLst>
-        <pc:spChg chg="mod">
-          <ac:chgData name="diagramador@aprovasim.com" userId="08c27f4fd777aeb1" providerId="LiveId" clId="{6DA82D89-F719-4B18-ABAA-0D43E56AF532}" dt="2026-02-09T14:25:03.632" v="433" actId="114"/>
-          <ac:spMkLst>
-            <pc:docMk/>
-            <pc:sldMk cId="428462983" sldId="463"/>
-            <ac:spMk id="2" creationId="{045AFF9F-211D-E437-10CE-AD7B0475C0A9}"/>
+            <pc:sldMk cId="4221201989" sldId="493"/>
+            <ac:spMk id="4" creationId="{7A710197-9388-3085-DF96-FCA34123ACEE}"/>
           </ac:spMkLst>
         </pc:spChg>
       </pc:sldChg>
       <pc:sldChg chg="modSp add mod">
-        <pc:chgData name="diagramador@aprovasim.com" userId="08c27f4fd777aeb1" providerId="LiveId" clId="{6DA82D89-F719-4B18-ABAA-0D43E56AF532}" dt="2026-02-09T14:25:35.537" v="439" actId="114"/>
+        <pc:chgData name="diagramador@aprovasim.com" userId="08c27f4fd777aeb1" providerId="LiveId" clId="{6DA82D89-F719-4B18-ABAA-0D43E56AF532}" dt="2026-07-01T18:19:48.801" v="1256" actId="20577"/>
         <pc:sldMkLst>
           <pc:docMk/>
-          <pc:sldMk cId="2946693669" sldId="464"/>
+          <pc:sldMk cId="4146467457" sldId="494"/>
         </pc:sldMkLst>
         <pc:spChg chg="mod">
-          <ac:chgData name="diagramador@aprovasim.com" userId="08c27f4fd777aeb1" providerId="LiveId" clId="{6DA82D89-F719-4B18-ABAA-0D43E56AF532}" dt="2026-02-09T14:25:35.537" v="439" actId="114"/>
+          <ac:chgData name="diagramador@aprovasim.com" userId="08c27f4fd777aeb1" providerId="LiveId" clId="{6DA82D89-F719-4B18-ABAA-0D43E56AF532}" dt="2026-07-01T18:19:48.801" v="1256" actId="20577"/>
           <ac:spMkLst>
             <pc:docMk/>
-            <pc:sldMk cId="2946693669" sldId="464"/>
-            <ac:spMk id="2" creationId="{087E5A8F-36D8-F476-069F-02DE62F9EC3B}"/>
-          </ac:spMkLst>
-        </pc:spChg>
-      </pc:sldChg>
-      <pc:sldChg chg="modSp add mod ord">
-        <pc:chgData name="diagramador@aprovasim.com" userId="08c27f4fd777aeb1" providerId="LiveId" clId="{6DA82D89-F719-4B18-ABAA-0D43E56AF532}" dt="2026-02-09T14:26:35.852" v="453" actId="179"/>
-        <pc:sldMkLst>
-          <pc:docMk/>
-          <pc:sldMk cId="3747639430" sldId="465"/>
-        </pc:sldMkLst>
-        <pc:spChg chg="mod">
-          <ac:chgData name="diagramador@aprovasim.com" userId="08c27f4fd777aeb1" providerId="LiveId" clId="{6DA82D89-F719-4B18-ABAA-0D43E56AF532}" dt="2026-02-09T14:26:35.852" v="453" actId="179"/>
-          <ac:spMkLst>
-            <pc:docMk/>
-            <pc:sldMk cId="3747639430" sldId="465"/>
-            <ac:spMk id="2" creationId="{811E4804-E9E7-18F4-4787-78380466A376}"/>
-          </ac:spMkLst>
-        </pc:spChg>
-      </pc:sldChg>
-      <pc:sldChg chg="modSp add mod ord">
-        <pc:chgData name="diagramador@aprovasim.com" userId="08c27f4fd777aeb1" providerId="LiveId" clId="{6DA82D89-F719-4B18-ABAA-0D43E56AF532}" dt="2026-02-09T14:27:13.078" v="481" actId="20577"/>
-        <pc:sldMkLst>
-          <pc:docMk/>
-          <pc:sldMk cId="1810316477" sldId="466"/>
-        </pc:sldMkLst>
-        <pc:spChg chg="mod">
-          <ac:chgData name="diagramador@aprovasim.com" userId="08c27f4fd777aeb1" providerId="LiveId" clId="{6DA82D89-F719-4B18-ABAA-0D43E56AF532}" dt="2026-02-09T14:27:13.078" v="481" actId="20577"/>
-          <ac:spMkLst>
-            <pc:docMk/>
-            <pc:sldMk cId="1810316477" sldId="466"/>
-            <ac:spMk id="104" creationId="{66F3D743-50E9-DBCF-9160-9A1FEA0B1091}"/>
+            <pc:sldMk cId="4146467457" sldId="494"/>
+            <ac:spMk id="4" creationId="{CD99A5DF-E4B0-1F75-95C2-29F821A302A4}"/>
           </ac:spMkLst>
         </pc:spChg>
       </pc:sldChg>
       <pc:sldChg chg="modSp add mod">
-        <pc:chgData name="diagramador@aprovasim.com" userId="08c27f4fd777aeb1" providerId="LiveId" clId="{6DA82D89-F719-4B18-ABAA-0D43E56AF532}" dt="2026-02-09T14:27:46.329" v="490" actId="948"/>
+        <pc:chgData name="diagramador@aprovasim.com" userId="08c27f4fd777aeb1" providerId="LiveId" clId="{6DA82D89-F719-4B18-ABAA-0D43E56AF532}" dt="2026-07-01T18:21:11.549" v="1292" actId="947"/>
         <pc:sldMkLst>
           <pc:docMk/>
-          <pc:sldMk cId="3598484628" sldId="467"/>
+          <pc:sldMk cId="4136479120" sldId="495"/>
         </pc:sldMkLst>
         <pc:spChg chg="mod">
-          <ac:chgData name="diagramador@aprovasim.com" userId="08c27f4fd777aeb1" providerId="LiveId" clId="{6DA82D89-F719-4B18-ABAA-0D43E56AF532}" dt="2026-02-09T14:27:46.329" v="490" actId="948"/>
+          <ac:chgData name="diagramador@aprovasim.com" userId="08c27f4fd777aeb1" providerId="LiveId" clId="{6DA82D89-F719-4B18-ABAA-0D43E56AF532}" dt="2026-07-01T18:21:11.549" v="1292" actId="947"/>
           <ac:spMkLst>
             <pc:docMk/>
-            <pc:sldMk cId="3598484628" sldId="467"/>
-            <ac:spMk id="2" creationId="{BDD5D093-21C9-5811-B76B-190B6C8BE1D4}"/>
-          </ac:spMkLst>
-        </pc:spChg>
-      </pc:sldChg>
-      <pc:sldChg chg="modSp add mod">
-        <pc:chgData name="diagramador@aprovasim.com" userId="08c27f4fd777aeb1" providerId="LiveId" clId="{6DA82D89-F719-4B18-ABAA-0D43E56AF532}" dt="2026-02-09T14:28:59.183" v="506" actId="1035"/>
-        <pc:sldMkLst>
-          <pc:docMk/>
-          <pc:sldMk cId="1214874937" sldId="468"/>
-        </pc:sldMkLst>
-        <pc:spChg chg="mod">
-          <ac:chgData name="diagramador@aprovasim.com" userId="08c27f4fd777aeb1" providerId="LiveId" clId="{6DA82D89-F719-4B18-ABAA-0D43E56AF532}" dt="2026-02-09T14:28:59.183" v="506" actId="1035"/>
-          <ac:spMkLst>
-            <pc:docMk/>
-            <pc:sldMk cId="1214874937" sldId="468"/>
-            <ac:spMk id="2" creationId="{6EA945C5-DBC9-D02F-FB6E-E08A487E785F}"/>
-          </ac:spMkLst>
-        </pc:spChg>
-      </pc:sldChg>
-      <pc:sldChg chg="modSp add mod">
-        <pc:chgData name="diagramador@aprovasim.com" userId="08c27f4fd777aeb1" providerId="LiveId" clId="{6DA82D89-F719-4B18-ABAA-0D43E56AF532}" dt="2026-02-09T14:29:24.932" v="510" actId="948"/>
-        <pc:sldMkLst>
-          <pc:docMk/>
-          <pc:sldMk cId="905604860" sldId="469"/>
-        </pc:sldMkLst>
-        <pc:spChg chg="mod">
-          <ac:chgData name="diagramador@aprovasim.com" userId="08c27f4fd777aeb1" providerId="LiveId" clId="{6DA82D89-F719-4B18-ABAA-0D43E56AF532}" dt="2026-02-09T14:29:24.932" v="510" actId="948"/>
-          <ac:spMkLst>
-            <pc:docMk/>
-            <pc:sldMk cId="905604860" sldId="469"/>
-            <ac:spMk id="2" creationId="{C0EE6CB4-FEE2-298B-1F90-DC38345762BC}"/>
-          </ac:spMkLst>
-        </pc:spChg>
-      </pc:sldChg>
-      <pc:sldChg chg="modSp add mod">
-        <pc:chgData name="diagramador@aprovasim.com" userId="08c27f4fd777aeb1" providerId="LiveId" clId="{6DA82D89-F719-4B18-ABAA-0D43E56AF532}" dt="2026-02-09T14:29:43.900" v="513" actId="948"/>
-        <pc:sldMkLst>
-          <pc:docMk/>
-          <pc:sldMk cId="2934673405" sldId="470"/>
-        </pc:sldMkLst>
-        <pc:spChg chg="mod">
-          <ac:chgData name="diagramador@aprovasim.com" userId="08c27f4fd777aeb1" providerId="LiveId" clId="{6DA82D89-F719-4B18-ABAA-0D43E56AF532}" dt="2026-02-09T14:29:43.900" v="513" actId="948"/>
-          <ac:spMkLst>
-            <pc:docMk/>
-            <pc:sldMk cId="2934673405" sldId="470"/>
-            <ac:spMk id="2" creationId="{628E437A-DB99-EAA5-D87B-6592C5ADEE43}"/>
-          </ac:spMkLst>
-        </pc:spChg>
-      </pc:sldChg>
-      <pc:sldChg chg="modSp add mod">
-        <pc:chgData name="diagramador@aprovasim.com" userId="08c27f4fd777aeb1" providerId="LiveId" clId="{6DA82D89-F719-4B18-ABAA-0D43E56AF532}" dt="2026-02-09T14:30:12.265" v="518" actId="255"/>
-        <pc:sldMkLst>
-          <pc:docMk/>
-          <pc:sldMk cId="745710927" sldId="471"/>
-        </pc:sldMkLst>
-        <pc:spChg chg="mod">
-          <ac:chgData name="diagramador@aprovasim.com" userId="08c27f4fd777aeb1" providerId="LiveId" clId="{6DA82D89-F719-4B18-ABAA-0D43E56AF532}" dt="2026-02-09T14:30:12.265" v="518" actId="255"/>
-          <ac:spMkLst>
-            <pc:docMk/>
-            <pc:sldMk cId="745710927" sldId="471"/>
-            <ac:spMk id="2" creationId="{38FCC70A-C8C7-2860-28AA-A011937FDA54}"/>
-          </ac:spMkLst>
-        </pc:spChg>
-      </pc:sldChg>
-      <pc:sldChg chg="modSp add mod">
-        <pc:chgData name="diagramador@aprovasim.com" userId="08c27f4fd777aeb1" providerId="LiveId" clId="{6DA82D89-F719-4B18-ABAA-0D43E56AF532}" dt="2026-02-09T14:31:12.081" v="538" actId="948"/>
-        <pc:sldMkLst>
-          <pc:docMk/>
-          <pc:sldMk cId="2753398722" sldId="472"/>
-        </pc:sldMkLst>
-        <pc:spChg chg="mod">
-          <ac:chgData name="diagramador@aprovasim.com" userId="08c27f4fd777aeb1" providerId="LiveId" clId="{6DA82D89-F719-4B18-ABAA-0D43E56AF532}" dt="2026-02-09T14:31:12.081" v="538" actId="948"/>
-          <ac:spMkLst>
-            <pc:docMk/>
-            <pc:sldMk cId="2753398722" sldId="472"/>
-            <ac:spMk id="2" creationId="{6F4B2E63-D099-A874-1A18-BF7A25705388}"/>
-          </ac:spMkLst>
-        </pc:spChg>
-      </pc:sldChg>
-      <pc:sldChg chg="modSp add mod">
-        <pc:chgData name="diagramador@aprovasim.com" userId="08c27f4fd777aeb1" providerId="LiveId" clId="{6DA82D89-F719-4B18-ABAA-0D43E56AF532}" dt="2026-02-09T14:31:20.356" v="541" actId="20577"/>
-        <pc:sldMkLst>
-          <pc:docMk/>
-          <pc:sldMk cId="3100452599" sldId="473"/>
-        </pc:sldMkLst>
-        <pc:spChg chg="mod">
-          <ac:chgData name="diagramador@aprovasim.com" userId="08c27f4fd777aeb1" providerId="LiveId" clId="{6DA82D89-F719-4B18-ABAA-0D43E56AF532}" dt="2026-02-09T14:31:20.356" v="541" actId="20577"/>
-          <ac:spMkLst>
-            <pc:docMk/>
-            <pc:sldMk cId="3100452599" sldId="473"/>
-            <ac:spMk id="2" creationId="{A1A16DA1-80C0-4A55-F47A-73C679D40F43}"/>
-          </ac:spMkLst>
-        </pc:spChg>
-      </pc:sldChg>
-      <pc:sldChg chg="modSp add mod">
-        <pc:chgData name="diagramador@aprovasim.com" userId="08c27f4fd777aeb1" providerId="LiveId" clId="{6DA82D89-F719-4B18-ABAA-0D43E56AF532}" dt="2026-02-09T14:32:10.224" v="557" actId="20577"/>
-        <pc:sldMkLst>
-          <pc:docMk/>
-          <pc:sldMk cId="1848671655" sldId="474"/>
-        </pc:sldMkLst>
-        <pc:spChg chg="mod">
-          <ac:chgData name="diagramador@aprovasim.com" userId="08c27f4fd777aeb1" providerId="LiveId" clId="{6DA82D89-F719-4B18-ABAA-0D43E56AF532}" dt="2026-02-09T14:32:10.224" v="557" actId="20577"/>
-          <ac:spMkLst>
-            <pc:docMk/>
-            <pc:sldMk cId="1848671655" sldId="474"/>
-            <ac:spMk id="2" creationId="{CCCC59FC-10D7-6333-B4B1-DC2CA9233FD8}"/>
-          </ac:spMkLst>
-        </pc:spChg>
-      </pc:sldChg>
-      <pc:sldChg chg="modSp add mod">
-        <pc:chgData name="diagramador@aprovasim.com" userId="08c27f4fd777aeb1" providerId="LiveId" clId="{6DA82D89-F719-4B18-ABAA-0D43E56AF532}" dt="2026-02-09T14:32:45.349" v="571" actId="20577"/>
-        <pc:sldMkLst>
-          <pc:docMk/>
-          <pc:sldMk cId="3512839482" sldId="475"/>
-        </pc:sldMkLst>
-        <pc:spChg chg="mod">
-          <ac:chgData name="diagramador@aprovasim.com" userId="08c27f4fd777aeb1" providerId="LiveId" clId="{6DA82D89-F719-4B18-ABAA-0D43E56AF532}" dt="2026-02-09T14:32:45.349" v="571" actId="20577"/>
-          <ac:spMkLst>
-            <pc:docMk/>
-            <pc:sldMk cId="3512839482" sldId="475"/>
-            <ac:spMk id="2" creationId="{AE79BE20-D4F1-2F1E-105D-E07103C8621C}"/>
-          </ac:spMkLst>
-        </pc:spChg>
-      </pc:sldChg>
-      <pc:sldChg chg="addSp delSp modSp add mod ord">
-        <pc:chgData name="diagramador@aprovasim.com" userId="08c27f4fd777aeb1" providerId="LiveId" clId="{6DA82D89-F719-4B18-ABAA-0D43E56AF532}" dt="2026-02-09T14:38:54.144" v="663" actId="22"/>
-        <pc:sldMkLst>
-          <pc:docMk/>
-          <pc:sldMk cId="4124489848" sldId="476"/>
-        </pc:sldMkLst>
-        <pc:spChg chg="mod">
-          <ac:chgData name="diagramador@aprovasim.com" userId="08c27f4fd777aeb1" providerId="LiveId" clId="{6DA82D89-F719-4B18-ABAA-0D43E56AF532}" dt="2026-02-09T14:33:02.281" v="594" actId="20577"/>
-          <ac:spMkLst>
-            <pc:docMk/>
-            <pc:sldMk cId="4124489848" sldId="476"/>
-            <ac:spMk id="104" creationId="{74731598-856A-F6FE-E596-0B5F2BD65D41}"/>
-          </ac:spMkLst>
-        </pc:spChg>
-      </pc:sldChg>
-      <pc:sldChg chg="addSp delSp modSp add mod">
-        <pc:chgData name="diagramador@aprovasim.com" userId="08c27f4fd777aeb1" providerId="LiveId" clId="{6DA82D89-F719-4B18-ABAA-0D43E56AF532}" dt="2026-02-09T14:33:53.229" v="610"/>
-        <pc:sldMkLst>
-          <pc:docMk/>
-          <pc:sldMk cId="3291254746" sldId="477"/>
-        </pc:sldMkLst>
-        <pc:spChg chg="mod">
-          <ac:chgData name="diagramador@aprovasim.com" userId="08c27f4fd777aeb1" providerId="LiveId" clId="{6DA82D89-F719-4B18-ABAA-0D43E56AF532}" dt="2026-02-09T14:33:50.919" v="602" actId="948"/>
-          <ac:spMkLst>
-            <pc:docMk/>
-            <pc:sldMk cId="3291254746" sldId="477"/>
-            <ac:spMk id="2" creationId="{F554092F-DE94-0978-B254-76BADD463D89}"/>
-          </ac:spMkLst>
-        </pc:spChg>
-      </pc:sldChg>
-      <pc:sldChg chg="modSp add mod">
-        <pc:chgData name="diagramador@aprovasim.com" userId="08c27f4fd777aeb1" providerId="LiveId" clId="{6DA82D89-F719-4B18-ABAA-0D43E56AF532}" dt="2026-02-09T14:34:09.562" v="613" actId="948"/>
-        <pc:sldMkLst>
-          <pc:docMk/>
-          <pc:sldMk cId="2295932068" sldId="478"/>
-        </pc:sldMkLst>
-        <pc:spChg chg="mod">
-          <ac:chgData name="diagramador@aprovasim.com" userId="08c27f4fd777aeb1" providerId="LiveId" clId="{6DA82D89-F719-4B18-ABAA-0D43E56AF532}" dt="2026-02-09T14:34:09.562" v="613" actId="948"/>
-          <ac:spMkLst>
-            <pc:docMk/>
-            <pc:sldMk cId="2295932068" sldId="478"/>
-            <ac:spMk id="2" creationId="{6A4FEBF3-105B-DAEE-5FF0-4D6915462B82}"/>
-          </ac:spMkLst>
-        </pc:spChg>
-      </pc:sldChg>
-      <pc:sldChg chg="modSp add mod">
-        <pc:chgData name="diagramador@aprovasim.com" userId="08c27f4fd777aeb1" providerId="LiveId" clId="{6DA82D89-F719-4B18-ABAA-0D43E56AF532}" dt="2026-02-09T14:34:25.716" v="616" actId="948"/>
-        <pc:sldMkLst>
-          <pc:docMk/>
-          <pc:sldMk cId="2415965614" sldId="479"/>
-        </pc:sldMkLst>
-        <pc:spChg chg="mod">
-          <ac:chgData name="diagramador@aprovasim.com" userId="08c27f4fd777aeb1" providerId="LiveId" clId="{6DA82D89-F719-4B18-ABAA-0D43E56AF532}" dt="2026-02-09T14:34:25.716" v="616" actId="948"/>
-          <ac:spMkLst>
-            <pc:docMk/>
-            <pc:sldMk cId="2415965614" sldId="479"/>
-            <ac:spMk id="2" creationId="{CEB14941-AB91-3035-505B-510E081D4273}"/>
-          </ac:spMkLst>
-        </pc:spChg>
-      </pc:sldChg>
-      <pc:sldChg chg="modSp add mod">
-        <pc:chgData name="diagramador@aprovasim.com" userId="08c27f4fd777aeb1" providerId="LiveId" clId="{6DA82D89-F719-4B18-ABAA-0D43E56AF532}" dt="2026-02-09T14:34:41.249" v="619" actId="948"/>
-        <pc:sldMkLst>
-          <pc:docMk/>
-          <pc:sldMk cId="855740417" sldId="480"/>
-        </pc:sldMkLst>
-        <pc:spChg chg="mod">
-          <ac:chgData name="diagramador@aprovasim.com" userId="08c27f4fd777aeb1" providerId="LiveId" clId="{6DA82D89-F719-4B18-ABAA-0D43E56AF532}" dt="2026-02-09T14:34:41.249" v="619" actId="948"/>
-          <ac:spMkLst>
-            <pc:docMk/>
-            <pc:sldMk cId="855740417" sldId="480"/>
-            <ac:spMk id="2" creationId="{BB0C4B97-063E-2424-D398-26741FECF70E}"/>
-          </ac:spMkLst>
-        </pc:spChg>
-      </pc:sldChg>
-      <pc:sldChg chg="modSp add mod">
-        <pc:chgData name="diagramador@aprovasim.com" userId="08c27f4fd777aeb1" providerId="LiveId" clId="{6DA82D89-F719-4B18-ABAA-0D43E56AF532}" dt="2026-02-09T14:36:47.470" v="623" actId="20577"/>
-        <pc:sldMkLst>
-          <pc:docMk/>
-          <pc:sldMk cId="2604416987" sldId="481"/>
-        </pc:sldMkLst>
-        <pc:spChg chg="mod">
-          <ac:chgData name="diagramador@aprovasim.com" userId="08c27f4fd777aeb1" providerId="LiveId" clId="{6DA82D89-F719-4B18-ABAA-0D43E56AF532}" dt="2026-02-09T14:36:47.470" v="623" actId="20577"/>
-          <ac:spMkLst>
-            <pc:docMk/>
-            <pc:sldMk cId="2604416987" sldId="481"/>
-            <ac:spMk id="2" creationId="{92721633-4492-F59E-FE6D-73C66489765A}"/>
-          </ac:spMkLst>
-        </pc:spChg>
-      </pc:sldChg>
-      <pc:sldChg chg="modSp add mod">
-        <pc:chgData name="diagramador@aprovasim.com" userId="08c27f4fd777aeb1" providerId="LiveId" clId="{6DA82D89-F719-4B18-ABAA-0D43E56AF532}" dt="2026-02-09T14:37:40.447" v="639" actId="948"/>
-        <pc:sldMkLst>
-          <pc:docMk/>
-          <pc:sldMk cId="2552705661" sldId="482"/>
-        </pc:sldMkLst>
-        <pc:spChg chg="mod">
-          <ac:chgData name="diagramador@aprovasim.com" userId="08c27f4fd777aeb1" providerId="LiveId" clId="{6DA82D89-F719-4B18-ABAA-0D43E56AF532}" dt="2026-02-09T14:37:40.447" v="639" actId="948"/>
-          <ac:spMkLst>
-            <pc:docMk/>
-            <pc:sldMk cId="2552705661" sldId="482"/>
-            <ac:spMk id="2" creationId="{685589DC-D37B-1E5C-9FF4-8BE3E5209D0A}"/>
-          </ac:spMkLst>
-        </pc:spChg>
-      </pc:sldChg>
-      <pc:sldChg chg="modSp add mod">
-        <pc:chgData name="diagramador@aprovasim.com" userId="08c27f4fd777aeb1" providerId="LiveId" clId="{6DA82D89-F719-4B18-ABAA-0D43E56AF532}" dt="2026-02-09T14:37:50.647" v="643" actId="20577"/>
-        <pc:sldMkLst>
-          <pc:docMk/>
-          <pc:sldMk cId="3474496741" sldId="483"/>
-        </pc:sldMkLst>
-        <pc:spChg chg="mod">
-          <ac:chgData name="diagramador@aprovasim.com" userId="08c27f4fd777aeb1" providerId="LiveId" clId="{6DA82D89-F719-4B18-ABAA-0D43E56AF532}" dt="2026-02-09T14:37:50.647" v="643" actId="20577"/>
-          <ac:spMkLst>
-            <pc:docMk/>
-            <pc:sldMk cId="3474496741" sldId="483"/>
-            <ac:spMk id="2" creationId="{A432F2DF-6F33-2CF1-1DAF-10EA11BDA3AB}"/>
-          </ac:spMkLst>
-        </pc:spChg>
-      </pc:sldChg>
-      <pc:sldChg chg="modSp add mod">
-        <pc:chgData name="diagramador@aprovasim.com" userId="08c27f4fd777aeb1" providerId="LiveId" clId="{6DA82D89-F719-4B18-ABAA-0D43E56AF532}" dt="2026-02-09T14:38:16.405" v="647" actId="20577"/>
-        <pc:sldMkLst>
-          <pc:docMk/>
-          <pc:sldMk cId="3227739132" sldId="484"/>
-        </pc:sldMkLst>
-        <pc:spChg chg="mod">
-          <ac:chgData name="diagramador@aprovasim.com" userId="08c27f4fd777aeb1" providerId="LiveId" clId="{6DA82D89-F719-4B18-ABAA-0D43E56AF532}" dt="2026-02-09T14:38:16.405" v="647" actId="20577"/>
-          <ac:spMkLst>
-            <pc:docMk/>
-            <pc:sldMk cId="3227739132" sldId="484"/>
-            <ac:spMk id="2" creationId="{6B2002D8-6689-A713-80B5-F861F68C9F2B}"/>
-          </ac:spMkLst>
-        </pc:spChg>
-      </pc:sldChg>
-      <pc:sldChg chg="modSp add mod">
-        <pc:chgData name="diagramador@aprovasim.com" userId="08c27f4fd777aeb1" providerId="LiveId" clId="{6DA82D89-F719-4B18-ABAA-0D43E56AF532}" dt="2026-02-09T14:38:39.276" v="661" actId="20577"/>
-        <pc:sldMkLst>
-          <pc:docMk/>
-          <pc:sldMk cId="3713488853" sldId="485"/>
-        </pc:sldMkLst>
-        <pc:spChg chg="mod">
-          <ac:chgData name="diagramador@aprovasim.com" userId="08c27f4fd777aeb1" providerId="LiveId" clId="{6DA82D89-F719-4B18-ABAA-0D43E56AF532}" dt="2026-02-09T14:38:39.276" v="661" actId="20577"/>
-          <ac:spMkLst>
-            <pc:docMk/>
-            <pc:sldMk cId="3713488853" sldId="485"/>
-            <ac:spMk id="2" creationId="{2F37B1F0-483D-EEDC-CE95-D60D0D328420}"/>
-          </ac:spMkLst>
-        </pc:spChg>
-      </pc:sldChg>
-      <pc:sldChg chg="modSp add mod ord">
-        <pc:chgData name="diagramador@aprovasim.com" userId="08c27f4fd777aeb1" providerId="LiveId" clId="{6DA82D89-F719-4B18-ABAA-0D43E56AF532}" dt="2026-02-09T14:39:05.993" v="687" actId="20577"/>
-        <pc:sldMkLst>
-          <pc:docMk/>
-          <pc:sldMk cId="2579604126" sldId="486"/>
-        </pc:sldMkLst>
-        <pc:spChg chg="mod">
-          <ac:chgData name="diagramador@aprovasim.com" userId="08c27f4fd777aeb1" providerId="LiveId" clId="{6DA82D89-F719-4B18-ABAA-0D43E56AF532}" dt="2026-02-09T14:39:05.993" v="687" actId="20577"/>
-          <ac:spMkLst>
-            <pc:docMk/>
-            <pc:sldMk cId="2579604126" sldId="486"/>
-            <ac:spMk id="104" creationId="{44ADCDD1-0BCF-7F44-43BA-B7915B3541FF}"/>
-          </ac:spMkLst>
-        </pc:spChg>
-      </pc:sldChg>
-      <pc:sldChg chg="modSp add mod">
-        <pc:chgData name="diagramador@aprovasim.com" userId="08c27f4fd777aeb1" providerId="LiveId" clId="{6DA82D89-F719-4B18-ABAA-0D43E56AF532}" dt="2026-02-09T14:39:32.543" v="692" actId="179"/>
-        <pc:sldMkLst>
-          <pc:docMk/>
-          <pc:sldMk cId="645627483" sldId="487"/>
-        </pc:sldMkLst>
-        <pc:spChg chg="mod">
-          <ac:chgData name="diagramador@aprovasim.com" userId="08c27f4fd777aeb1" providerId="LiveId" clId="{6DA82D89-F719-4B18-ABAA-0D43E56AF532}" dt="2026-02-09T14:39:32.543" v="692" actId="179"/>
-          <ac:spMkLst>
-            <pc:docMk/>
-            <pc:sldMk cId="645627483" sldId="487"/>
-            <ac:spMk id="2" creationId="{D1F08BA2-75BC-90C1-F68E-CF2E04E3861F}"/>
-          </ac:spMkLst>
-        </pc:spChg>
-      </pc:sldChg>
-      <pc:sldChg chg="modSp add mod">
-        <pc:chgData name="diagramador@aprovasim.com" userId="08c27f4fd777aeb1" providerId="LiveId" clId="{6DA82D89-F719-4B18-ABAA-0D43E56AF532}" dt="2026-02-09T14:40:04.413" v="700" actId="948"/>
-        <pc:sldMkLst>
-          <pc:docMk/>
-          <pc:sldMk cId="705934589" sldId="488"/>
-        </pc:sldMkLst>
-        <pc:spChg chg="mod">
-          <ac:chgData name="diagramador@aprovasim.com" userId="08c27f4fd777aeb1" providerId="LiveId" clId="{6DA82D89-F719-4B18-ABAA-0D43E56AF532}" dt="2026-02-09T14:40:04.413" v="700" actId="948"/>
-          <ac:spMkLst>
-            <pc:docMk/>
-            <pc:sldMk cId="705934589" sldId="488"/>
-            <ac:spMk id="2" creationId="{EF08E4D9-EA37-0E30-0951-B8BAE60EE5B8}"/>
-          </ac:spMkLst>
-        </pc:spChg>
-      </pc:sldChg>
-      <pc:sldChg chg="modSp add mod">
-        <pc:chgData name="diagramador@aprovasim.com" userId="08c27f4fd777aeb1" providerId="LiveId" clId="{6DA82D89-F719-4B18-ABAA-0D43E56AF532}" dt="2026-02-09T14:40:33.459" v="705" actId="114"/>
-        <pc:sldMkLst>
-          <pc:docMk/>
-          <pc:sldMk cId="1461998062" sldId="489"/>
-        </pc:sldMkLst>
-        <pc:spChg chg="mod">
-          <ac:chgData name="diagramador@aprovasim.com" userId="08c27f4fd777aeb1" providerId="LiveId" clId="{6DA82D89-F719-4B18-ABAA-0D43E56AF532}" dt="2026-02-09T14:40:33.459" v="705" actId="114"/>
-          <ac:spMkLst>
-            <pc:docMk/>
-            <pc:sldMk cId="1461998062" sldId="489"/>
-            <ac:spMk id="2" creationId="{1DAE769B-0C23-AC17-FAD3-CBAD38702D63}"/>
-          </ac:spMkLst>
-        </pc:spChg>
-      </pc:sldChg>
-      <pc:sldChg chg="modSp add mod">
-        <pc:chgData name="diagramador@aprovasim.com" userId="08c27f4fd777aeb1" providerId="LiveId" clId="{6DA82D89-F719-4B18-ABAA-0D43E56AF532}" dt="2026-02-09T14:40:55.054" v="708" actId="948"/>
-        <pc:sldMkLst>
-          <pc:docMk/>
-          <pc:sldMk cId="2113140958" sldId="490"/>
-        </pc:sldMkLst>
-        <pc:spChg chg="mod">
-          <ac:chgData name="diagramador@aprovasim.com" userId="08c27f4fd777aeb1" providerId="LiveId" clId="{6DA82D89-F719-4B18-ABAA-0D43E56AF532}" dt="2026-02-09T14:40:55.054" v="708" actId="948"/>
-          <ac:spMkLst>
-            <pc:docMk/>
-            <pc:sldMk cId="2113140958" sldId="490"/>
-            <ac:spMk id="2" creationId="{620AC398-2FE0-87A7-E849-347738C3D417}"/>
-          </ac:spMkLst>
-        </pc:spChg>
-      </pc:sldChg>
-      <pc:sldChg chg="modSp add mod">
-        <pc:chgData name="diagramador@aprovasim.com" userId="08c27f4fd777aeb1" providerId="LiveId" clId="{6DA82D89-F719-4B18-ABAA-0D43E56AF532}" dt="2026-02-09T14:41:16.459" v="712" actId="948"/>
-        <pc:sldMkLst>
-          <pc:docMk/>
-          <pc:sldMk cId="1819164986" sldId="491"/>
-        </pc:sldMkLst>
-        <pc:spChg chg="mod">
-          <ac:chgData name="diagramador@aprovasim.com" userId="08c27f4fd777aeb1" providerId="LiveId" clId="{6DA82D89-F719-4B18-ABAA-0D43E56AF532}" dt="2026-02-09T14:41:16.459" v="712" actId="948"/>
-          <ac:spMkLst>
-            <pc:docMk/>
-            <pc:sldMk cId="1819164986" sldId="491"/>
-            <ac:spMk id="2" creationId="{D9A392C5-C27B-3FF2-445B-E7FABB78DFB9}"/>
-          </ac:spMkLst>
-        </pc:spChg>
-      </pc:sldChg>
-      <pc:sldChg chg="modSp add mod">
-        <pc:chgData name="diagramador@aprovasim.com" userId="08c27f4fd777aeb1" providerId="LiveId" clId="{6DA82D89-F719-4B18-ABAA-0D43E56AF532}" dt="2026-02-09T14:42:03.999" v="719" actId="114"/>
-        <pc:sldMkLst>
-          <pc:docMk/>
-          <pc:sldMk cId="689562868" sldId="492"/>
-        </pc:sldMkLst>
-        <pc:spChg chg="mod">
-          <ac:chgData name="diagramador@aprovasim.com" userId="08c27f4fd777aeb1" providerId="LiveId" clId="{6DA82D89-F719-4B18-ABAA-0D43E56AF532}" dt="2026-02-09T14:42:03.999" v="719" actId="114"/>
-          <ac:spMkLst>
-            <pc:docMk/>
-            <pc:sldMk cId="689562868" sldId="492"/>
-            <ac:spMk id="2" creationId="{3F8765C7-1B60-6D8D-5100-FC5F8B8FB7CE}"/>
-          </ac:spMkLst>
-        </pc:spChg>
-      </pc:sldChg>
-      <pc:sldChg chg="modSp add mod">
-        <pc:chgData name="diagramador@aprovasim.com" userId="08c27f4fd777aeb1" providerId="LiveId" clId="{6DA82D89-F719-4B18-ABAA-0D43E56AF532}" dt="2026-02-09T14:42:27.069" v="725" actId="114"/>
-        <pc:sldMkLst>
-          <pc:docMk/>
-          <pc:sldMk cId="3062639225" sldId="493"/>
-        </pc:sldMkLst>
-        <pc:spChg chg="mod">
-          <ac:chgData name="diagramador@aprovasim.com" userId="08c27f4fd777aeb1" providerId="LiveId" clId="{6DA82D89-F719-4B18-ABAA-0D43E56AF532}" dt="2026-02-09T14:42:27.069" v="725" actId="114"/>
-          <ac:spMkLst>
-            <pc:docMk/>
-            <pc:sldMk cId="3062639225" sldId="493"/>
-            <ac:spMk id="2" creationId="{43555A2A-2868-F2BD-6968-02FFBAF4E8AC}"/>
-          </ac:spMkLst>
-        </pc:spChg>
-      </pc:sldChg>
-      <pc:sldChg chg="modSp add mod">
-        <pc:chgData name="diagramador@aprovasim.com" userId="08c27f4fd777aeb1" providerId="LiveId" clId="{6DA82D89-F719-4B18-ABAA-0D43E56AF532}" dt="2026-02-09T14:42:54.032" v="739" actId="20577"/>
-        <pc:sldMkLst>
-          <pc:docMk/>
-          <pc:sldMk cId="3148277413" sldId="494"/>
-        </pc:sldMkLst>
-        <pc:spChg chg="mod">
-          <ac:chgData name="diagramador@aprovasim.com" userId="08c27f4fd777aeb1" providerId="LiveId" clId="{6DA82D89-F719-4B18-ABAA-0D43E56AF532}" dt="2026-02-09T14:42:54.032" v="739" actId="20577"/>
-          <ac:spMkLst>
-            <pc:docMk/>
-            <pc:sldMk cId="3148277413" sldId="494"/>
-            <ac:spMk id="2" creationId="{2FF1F5F4-20D6-61DC-66A9-837353B2C5AF}"/>
-          </ac:spMkLst>
-        </pc:spChg>
-      </pc:sldChg>
-      <pc:sldChg chg="modSp add mod">
-        <pc:chgData name="diagramador@aprovasim.com" userId="08c27f4fd777aeb1" providerId="LiveId" clId="{6DA82D89-F719-4B18-ABAA-0D43E56AF532}" dt="2026-02-09T14:43:21.640" v="753" actId="114"/>
-        <pc:sldMkLst>
-          <pc:docMk/>
-          <pc:sldMk cId="3124406827" sldId="495"/>
-        </pc:sldMkLst>
-        <pc:spChg chg="mod">
-          <ac:chgData name="diagramador@aprovasim.com" userId="08c27f4fd777aeb1" providerId="LiveId" clId="{6DA82D89-F719-4B18-ABAA-0D43E56AF532}" dt="2026-02-09T14:43:21.640" v="753" actId="114"/>
-          <ac:spMkLst>
-            <pc:docMk/>
-            <pc:sldMk cId="3124406827" sldId="495"/>
-            <ac:spMk id="2" creationId="{05938EA2-9501-65E2-7D6E-B692CE4BD804}"/>
-          </ac:spMkLst>
-        </pc:spChg>
-      </pc:sldChg>
-      <pc:sldChg chg="modSp add mod">
-        <pc:chgData name="diagramador@aprovasim.com" userId="08c27f4fd777aeb1" providerId="LiveId" clId="{6DA82D89-F719-4B18-ABAA-0D43E56AF532}" dt="2026-02-09T14:43:51.825" v="767" actId="20577"/>
-        <pc:sldMkLst>
-          <pc:docMk/>
-          <pc:sldMk cId="1190156180" sldId="496"/>
-        </pc:sldMkLst>
-        <pc:spChg chg="mod">
-          <ac:chgData name="diagramador@aprovasim.com" userId="08c27f4fd777aeb1" providerId="LiveId" clId="{6DA82D89-F719-4B18-ABAA-0D43E56AF532}" dt="2026-02-09T14:43:51.825" v="767" actId="20577"/>
-          <ac:spMkLst>
-            <pc:docMk/>
-            <pc:sldMk cId="1190156180" sldId="496"/>
-            <ac:spMk id="2" creationId="{9E7AF291-E856-BB05-32D3-44EBE53359F0}"/>
-          </ac:spMkLst>
-        </pc:spChg>
-      </pc:sldChg>
-    </pc:docChg>
-  </pc:docChgLst>
-  <pc:docChgLst>
-    <pc:chgData name="Diagramador 3" userId="469e67d6cc97f242" providerId="LiveId" clId="{CD6DD98B-771F-4E9C-8F85-603759ECED3A}"/>
-    <pc:docChg chg="modSld">
-      <pc:chgData name="Diagramador 3" userId="469e67d6cc97f242" providerId="LiveId" clId="{CD6DD98B-771F-4E9C-8F85-603759ECED3A}" dt="2026-03-02T18:26:53.385" v="1" actId="20577"/>
-      <pc:docMkLst>
-        <pc:docMk/>
-      </pc:docMkLst>
-      <pc:sldChg chg="modSp mod">
-        <pc:chgData name="Diagramador 3" userId="469e67d6cc97f242" providerId="LiveId" clId="{CD6DD98B-771F-4E9C-8F85-603759ECED3A}" dt="2026-03-02T18:26:53.385" v="1" actId="20577"/>
-        <pc:sldMkLst>
-          <pc:docMk/>
-          <pc:sldMk cId="1885894788" sldId="438"/>
-        </pc:sldMkLst>
-        <pc:spChg chg="mod">
-          <ac:chgData name="Diagramador 3" userId="469e67d6cc97f242" providerId="LiveId" clId="{CD6DD98B-771F-4E9C-8F85-603759ECED3A}" dt="2026-03-02T18:26:53.385" v="1" actId="20577"/>
-          <ac:spMkLst>
-            <pc:docMk/>
-            <pc:sldMk cId="1885894788" sldId="438"/>
-            <ac:spMk id="2" creationId="{032E3546-7A9D-ADAA-67D4-5466FB63891F}"/>
+            <pc:sldMk cId="4136479120" sldId="495"/>
+            <ac:spMk id="4" creationId="{72C57BD7-2978-59F3-0F36-7B8FE4A52314}"/>
           </ac:spMkLst>
         </pc:spChg>
       </pc:sldChg>
@@ -1394,7 +897,7 @@
           <a:p>
             <a:fld id="{6EB02EDE-24A5-48AA-8412-E7CBD7F4CFCE}" type="datetimeFigureOut">
               <a:rPr lang="pt-BR" smtClean="0"/>
-              <a:t>02/03/2026</a:t>
+              <a:t>28/07/2026</a:t>
             </a:fld>
             <a:endParaRPr lang="pt-BR"/>
           </a:p>
@@ -1956,7 +1459,7 @@
           <a:p>
             <a:fld id="{46207116-AAC5-4A69-B50F-7FADCFFD150F}" type="datetimeFigureOut">
               <a:rPr lang="pt-BR" smtClean="0"/>
-              <a:t>02/03/2026</a:t>
+              <a:t>28/07/2026</a:t>
             </a:fld>
             <a:endParaRPr lang="pt-BR"/>
           </a:p>
@@ -2126,7 +1629,7 @@
           <a:p>
             <a:fld id="{46207116-AAC5-4A69-B50F-7FADCFFD150F}" type="datetimeFigureOut">
               <a:rPr lang="pt-BR" smtClean="0"/>
-              <a:t>02/03/2026</a:t>
+              <a:t>28/07/2026</a:t>
             </a:fld>
             <a:endParaRPr lang="pt-BR"/>
           </a:p>
@@ -2306,7 +1809,7 @@
           <a:p>
             <a:fld id="{46207116-AAC5-4A69-B50F-7FADCFFD150F}" type="datetimeFigureOut">
               <a:rPr lang="pt-BR" smtClean="0"/>
-              <a:t>02/03/2026</a:t>
+              <a:t>28/07/2026</a:t>
             </a:fld>
             <a:endParaRPr lang="pt-BR"/>
           </a:p>
@@ -2476,7 +1979,7 @@
           <a:p>
             <a:fld id="{46207116-AAC5-4A69-B50F-7FADCFFD150F}" type="datetimeFigureOut">
               <a:rPr lang="pt-BR" smtClean="0"/>
-              <a:t>02/03/2026</a:t>
+              <a:t>28/07/2026</a:t>
             </a:fld>
             <a:endParaRPr lang="pt-BR"/>
           </a:p>
@@ -2722,7 +2225,7 @@
           <a:p>
             <a:fld id="{46207116-AAC5-4A69-B50F-7FADCFFD150F}" type="datetimeFigureOut">
               <a:rPr lang="pt-BR" smtClean="0"/>
-              <a:t>02/03/2026</a:t>
+              <a:t>28/07/2026</a:t>
             </a:fld>
             <a:endParaRPr lang="pt-BR"/>
           </a:p>
@@ -2954,7 +2457,7 @@
           <a:p>
             <a:fld id="{46207116-AAC5-4A69-B50F-7FADCFFD150F}" type="datetimeFigureOut">
               <a:rPr lang="pt-BR" smtClean="0"/>
-              <a:t>02/03/2026</a:t>
+              <a:t>28/07/2026</a:t>
             </a:fld>
             <a:endParaRPr lang="pt-BR"/>
           </a:p>
@@ -3321,7 +2824,7 @@
           <a:p>
             <a:fld id="{46207116-AAC5-4A69-B50F-7FADCFFD150F}" type="datetimeFigureOut">
               <a:rPr lang="pt-BR" smtClean="0"/>
-              <a:t>02/03/2026</a:t>
+              <a:t>28/07/2026</a:t>
             </a:fld>
             <a:endParaRPr lang="pt-BR"/>
           </a:p>
@@ -3439,7 +2942,7 @@
           <a:p>
             <a:fld id="{46207116-AAC5-4A69-B50F-7FADCFFD150F}" type="datetimeFigureOut">
               <a:rPr lang="pt-BR" smtClean="0"/>
-              <a:t>02/03/2026</a:t>
+              <a:t>28/07/2026</a:t>
             </a:fld>
             <a:endParaRPr lang="pt-BR"/>
           </a:p>
@@ -3534,7 +3037,7 @@
           <a:p>
             <a:fld id="{46207116-AAC5-4A69-B50F-7FADCFFD150F}" type="datetimeFigureOut">
               <a:rPr lang="pt-BR" smtClean="0"/>
-              <a:t>02/03/2026</a:t>
+              <a:t>28/07/2026</a:t>
             </a:fld>
             <a:endParaRPr lang="pt-BR"/>
           </a:p>
@@ -3811,7 +3314,7 @@
           <a:p>
             <a:fld id="{46207116-AAC5-4A69-B50F-7FADCFFD150F}" type="datetimeFigureOut">
               <a:rPr lang="pt-BR" smtClean="0"/>
-              <a:t>02/03/2026</a:t>
+              <a:t>28/07/2026</a:t>
             </a:fld>
             <a:endParaRPr lang="pt-BR"/>
           </a:p>
@@ -4068,7 +3571,7 @@
           <a:p>
             <a:fld id="{46207116-AAC5-4A69-B50F-7FADCFFD150F}" type="datetimeFigureOut">
               <a:rPr lang="pt-BR" smtClean="0"/>
-              <a:t>02/03/2026</a:t>
+              <a:t>28/07/2026</a:t>
             </a:fld>
             <a:endParaRPr lang="pt-BR"/>
           </a:p>
@@ -4290,7 +3793,7 @@
           <a:p>
             <a:fld id="{46207116-AAC5-4A69-B50F-7FADCFFD150F}" type="datetimeFigureOut">
               <a:rPr lang="pt-BR" smtClean="0"/>
-              <a:t>02/03/2026</a:t>
+              <a:t>28/07/2026</a:t>
             </a:fld>
             <a:endParaRPr lang="pt-BR"/>
           </a:p>
@@ -4841,8 +4344,8 @@
         </p:nvSpPr>
         <p:spPr>
           <a:xfrm>
-            <a:off x="2135155" y="2767141"/>
-            <a:ext cx="7921690" cy="1446509"/>
+            <a:off x="1271570" y="3429000"/>
+            <a:ext cx="9648858" cy="707846"/>
           </a:xfrm>
           <a:prstGeom prst="rect">
             <a:avLst/>
@@ -4868,7 +4371,7 @@
               <a:buNone/>
             </a:pPr>
             <a:r>
-              <a:rPr lang="pt-BR" sz="4400" b="1" i="0" u="none" strike="noStrike" cap="none" dirty="0">
+              <a:rPr lang="pt-BR" sz="4000" b="1" i="0" u="none" strike="noStrike" cap="none" dirty="0">
                 <a:solidFill>
                   <a:srgbClr val="2F5496"/>
                 </a:solidFill>
@@ -4877,71 +4380,9 @@
                 <a:cs typeface="Arial Black"/>
                 <a:sym typeface="Arial Black"/>
               </a:rPr>
-              <a:t>ATUALIDADES DO MERCADO FINANCEIRO</a:t>
-            </a:r>
-            <a:endParaRPr dirty="0"/>
-          </a:p>
-        </p:txBody>
-      </p:sp>
-      <p:sp>
-        <p:nvSpPr>
-          <p:cNvPr id="90" name="Google Shape;90;p2"/>
-          <p:cNvSpPr txBox="1"/>
-          <p:nvPr/>
-        </p:nvSpPr>
-        <p:spPr>
-          <a:xfrm>
-            <a:off x="2135155" y="4521151"/>
-            <a:ext cx="7848600" cy="523220"/>
-          </a:xfrm>
-          <a:prstGeom prst="rect">
-            <a:avLst/>
-          </a:prstGeom>
-          <a:noFill/>
-          <a:ln>
-            <a:noFill/>
-          </a:ln>
-        </p:spPr>
-        <p:txBody>
-          <a:bodyPr spcFirstLastPara="1" wrap="square" lIns="91425" tIns="45700" rIns="91425" bIns="45700" anchor="t" anchorCtr="0">
-            <a:spAutoFit/>
-          </a:bodyPr>
-          <a:lstStyle/>
-          <a:p>
-            <a:pPr marL="0" marR="0" lvl="0" indent="0" algn="ctr" rtl="0">
-              <a:spcBef>
-                <a:spcPts val="0"/>
-              </a:spcBef>
-              <a:spcAft>
-                <a:spcPts val="0"/>
-              </a:spcAft>
-              <a:buNone/>
-            </a:pPr>
-            <a:r>
-              <a:rPr lang="pt-BR" sz="2800" b="1" i="0" u="none" strike="noStrike" cap="none" dirty="0">
-                <a:solidFill>
-                  <a:schemeClr val="dk1"/>
-                </a:solidFill>
-                <a:latin typeface="Arial"/>
-                <a:ea typeface="Arial"/>
-                <a:cs typeface="Arial"/>
-                <a:sym typeface="Arial"/>
-              </a:rPr>
-              <a:t>Professor: </a:t>
-            </a:r>
-            <a:r>
-              <a:rPr lang="pt-BR" sz="2800" b="1" i="0" u="none" strike="noStrike" cap="none" dirty="0" err="1">
-                <a:solidFill>
-                  <a:schemeClr val="dk1"/>
-                </a:solidFill>
-                <a:latin typeface="Arial"/>
-                <a:ea typeface="Arial"/>
-                <a:cs typeface="Arial"/>
-                <a:sym typeface="Arial"/>
-              </a:rPr>
-              <a:t>Baldacci</a:t>
-            </a:r>
-            <a:endParaRPr dirty="0"/>
+              <a:t>Instrumentação — Transmissores</a:t>
+            </a:r>
+            <a:endParaRPr sz="1600" dirty="0"/>
           </a:p>
         </p:txBody>
       </p:sp>
@@ -4953,7 +4394,7 @@
         </p:nvSpPr>
         <p:spPr>
           <a:xfrm>
-            <a:off x="1205592" y="1536310"/>
+            <a:off x="1205592" y="1963692"/>
             <a:ext cx="9780815" cy="923330"/>
           </a:xfrm>
           <a:prstGeom prst="rect">
@@ -5022,6 +4463,62 @@
           </a:ln>
         </p:spPr>
       </p:pic>
+      <p:sp>
+        <p:nvSpPr>
+          <p:cNvPr id="2" name="Google Shape;90;p2">
+            <a:extLst>
+              <a:ext uri="{FF2B5EF4-FFF2-40B4-BE49-F238E27FC236}">
+                <a16:creationId xmlns:a16="http://schemas.microsoft.com/office/drawing/2014/main" id="{90353096-98F1-E1DC-45F2-28C9D8642FC6}"/>
+              </a:ext>
+            </a:extLst>
+          </p:cNvPr>
+          <p:cNvSpPr txBox="1"/>
+          <p:nvPr/>
+        </p:nvSpPr>
+        <p:spPr>
+          <a:xfrm>
+            <a:off x="2135155" y="5067999"/>
+            <a:ext cx="7848600" cy="523220"/>
+          </a:xfrm>
+          <a:prstGeom prst="rect">
+            <a:avLst/>
+          </a:prstGeom>
+          <a:noFill/>
+          <a:ln>
+            <a:noFill/>
+          </a:ln>
+        </p:spPr>
+        <p:txBody>
+          <a:bodyPr spcFirstLastPara="1" wrap="square" lIns="91425" tIns="45700" rIns="91425" bIns="45700" anchor="t" anchorCtr="0">
+            <a:spAutoFit/>
+          </a:bodyPr>
+          <a:lstStyle/>
+          <a:p>
+            <a:pPr marL="0" marR="0" lvl="0" indent="0" algn="ctr" rtl="0">
+              <a:spcBef>
+                <a:spcPts val="0"/>
+              </a:spcBef>
+              <a:spcAft>
+                <a:spcPts val="0"/>
+              </a:spcAft>
+              <a:buNone/>
+            </a:pPr>
+            <a:r>
+              <a:rPr lang="pt-BR" sz="2800" b="1" i="0" u="none" strike="noStrike" cap="none" dirty="0">
+                <a:solidFill>
+                  <a:schemeClr val="dk1"/>
+                </a:solidFill>
+                <a:latin typeface="Arial"/>
+                <a:ea typeface="Arial"/>
+                <a:cs typeface="Arial"/>
+                <a:sym typeface="Arial"/>
+              </a:rPr>
+              <a:t>Professor: Marcelo</a:t>
+            </a:r>
+            <a:endParaRPr dirty="0"/>
+          </a:p>
+        </p:txBody>
+      </p:sp>
     </p:spTree>
   </p:cSld>
   <p:clrMapOvr>
@@ -5049,14 +4546,14 @@
       </p:grpSpPr>
       <p:sp>
         <p:nvSpPr>
-          <p:cNvPr id="2" name="Retângulo 1"/>
+          <p:cNvPr id="2" name="Retangulo 1"/>
           <p:cNvSpPr/>
           <p:nvPr/>
         </p:nvSpPr>
         <p:spPr>
           <a:xfrm>
             <a:off x="407988" y="1016000"/>
-            <a:ext cx="11376025" cy="5083379"/>
+            <a:ext cx="11376025" cy="3996543"/>
           </a:xfrm>
           <a:prstGeom prst="rect">
             <a:avLst/>
@@ -5074,18 +4571,13 @@
               </a:lnSpc>
             </a:pPr>
             <a:r>
-              <a:rPr lang="pt-BR" sz="2200" b="1" spc="15" dirty="0">
+              <a:rPr lang="pt-BR" sz="2200" b="1" spc="-20" dirty="0">
                 <a:latin typeface="Arial" panose="020B0604020202020204" pitchFamily="34" charset="0"/>
                 <a:ea typeface="Calibri" panose="020F0502020204030204" pitchFamily="34" charset="0"/>
                 <a:cs typeface="Arial" panose="020B0604020202020204" pitchFamily="34" charset="0"/>
               </a:rPr>
-              <a:t>Os diretores de um banco procuraram influenciadores digitais para lhes apresentar os fundos de investimento do banco. Eles sabem que os influenciadores digitais divulgam informalmente produtos bancários e oferecem conselhos ou informações sobre investimentos financeiros, dizendo, por exemplo, quais, dentre as diversas opções de aplicações financeiras, são as melhores para o tipo de audiência que o acompanha. Os influenciadores digitais, portanto, funcionam como:</a:t>
-            </a:r>
-            <a:endParaRPr lang="pt-BR" sz="2200" b="1" dirty="0">
-              <a:latin typeface="Arial" panose="020B0604020202020204" pitchFamily="34" charset="0"/>
-              <a:ea typeface="Calibri" panose="020F0502020204030204" pitchFamily="34" charset="0"/>
-              <a:cs typeface="Arial" panose="020B0604020202020204" pitchFamily="34" charset="0"/>
-            </a:endParaRPr>
+              <a:t>Em um instrumento, o elemento transmissor</a:t>
+            </a:r>
           </a:p>
           <a:p>
             <a:pPr algn="just">
@@ -5093,17 +4585,14 @@
                 <a:spcPct val="107000"/>
               </a:lnSpc>
             </a:pPr>
-            <a:r>
-              <a:rPr lang="pt-BR" sz="2200" dirty="0">
-                <a:latin typeface="Arial" panose="020B0604020202020204" pitchFamily="34" charset="0"/>
-                <a:ea typeface="Calibri" panose="020F0502020204030204" pitchFamily="34" charset="0"/>
-                <a:cs typeface="Arial" panose="020B0604020202020204" pitchFamily="34" charset="0"/>
-              </a:rPr>
-              <a:t> </a:t>
-            </a:r>
-          </a:p>
-          <a:p>
-            <a:pPr marL="215900" indent="-215900" algn="just">
+            <a:endParaRPr lang="pt-BR" sz="2200" b="1" spc="15" dirty="0">
+              <a:latin typeface="Arial" panose="020B0604020202020204" pitchFamily="34" charset="0"/>
+              <a:ea typeface="Calibri" panose="020F0502020204030204" pitchFamily="34" charset="0"/>
+              <a:cs typeface="Arial" panose="020B0604020202020204" pitchFamily="34" charset="0"/>
+            </a:endParaRPr>
+          </a:p>
+          <a:p>
+            <a:pPr marL="447675" indent="-447675" algn="just">
               <a:lnSpc>
                 <a:spcPct val="107000"/>
               </a:lnSpc>
@@ -5112,16 +4601,16 @@
               </a:spcAft>
             </a:pPr>
             <a:r>
-              <a:rPr lang="pt-BR" sz="2200" dirty="0">
+              <a:rPr lang="pt-BR" sz="2200" spc="15" dirty="0">
                 <a:latin typeface="Arial" panose="020B0604020202020204" pitchFamily="34" charset="0"/>
                 <a:ea typeface="Calibri" panose="020F0502020204030204" pitchFamily="34" charset="0"/>
                 <a:cs typeface="Arial" panose="020B0604020202020204" pitchFamily="34" charset="0"/>
               </a:rPr>
-              <a:t>A) fontes de intervenção.</a:t>
-            </a:r>
-          </a:p>
-          <a:p>
-            <a:pPr marL="215900" indent="-215900" algn="just">
+              <a:t>A)	detecta alterações na variável do processo.</a:t>
+            </a:r>
+          </a:p>
+          <a:p>
+            <a:pPr marL="447675" indent="-447675" algn="just">
               <a:lnSpc>
                 <a:spcPct val="107000"/>
               </a:lnSpc>
@@ -5130,16 +4619,16 @@
               </a:spcAft>
             </a:pPr>
             <a:r>
-              <a:rPr lang="pt-BR" sz="2200" dirty="0">
+              <a:rPr lang="pt-BR" sz="2200" spc="15" dirty="0">
                 <a:latin typeface="Arial" panose="020B0604020202020204" pitchFamily="34" charset="0"/>
                 <a:ea typeface="Calibri" panose="020F0502020204030204" pitchFamily="34" charset="0"/>
                 <a:cs typeface="Arial" panose="020B0604020202020204" pitchFamily="34" charset="0"/>
               </a:rPr>
-              <a:t>B) grupo de afinidade.</a:t>
-            </a:r>
-          </a:p>
-          <a:p>
-            <a:pPr marL="215900" indent="-215900" algn="just">
+              <a:t>B)	indica o valor da variável do processo a ser controlada.</a:t>
+            </a:r>
+          </a:p>
+          <a:p>
+            <a:pPr marL="447675" indent="-447675" algn="just">
               <a:lnSpc>
                 <a:spcPct val="107000"/>
               </a:lnSpc>
@@ -5148,16 +4637,16 @@
               </a:spcAft>
             </a:pPr>
             <a:r>
-              <a:rPr lang="pt-BR" sz="2200" dirty="0">
+              <a:rPr lang="pt-BR" sz="2200" spc="15" dirty="0">
                 <a:latin typeface="Arial" panose="020B0604020202020204" pitchFamily="34" charset="0"/>
                 <a:ea typeface="Calibri" panose="020F0502020204030204" pitchFamily="34" charset="0"/>
                 <a:cs typeface="Arial" panose="020B0604020202020204" pitchFamily="34" charset="0"/>
               </a:rPr>
-              <a:t>C) referências primárias.</a:t>
-            </a:r>
-          </a:p>
-          <a:p>
-            <a:pPr marL="215900" indent="-215900" algn="just">
+              <a:t>C)	registra os valores instantâneos da variável do processo.</a:t>
+            </a:r>
+          </a:p>
+          <a:p>
+            <a:pPr marL="447675" indent="-447675" algn="just">
               <a:lnSpc>
                 <a:spcPct val="107000"/>
               </a:lnSpc>
@@ -5166,37 +4655,35 @@
               </a:spcAft>
             </a:pPr>
             <a:r>
-              <a:rPr lang="pt-BR" sz="2200" dirty="0">
+              <a:rPr lang="pt-BR" sz="2200" spc="15" dirty="0">
                 <a:latin typeface="Arial" panose="020B0604020202020204" pitchFamily="34" charset="0"/>
                 <a:ea typeface="Calibri" panose="020F0502020204030204" pitchFamily="34" charset="0"/>
                 <a:cs typeface="Arial" panose="020B0604020202020204" pitchFamily="34" charset="0"/>
               </a:rPr>
-              <a:t>D) líderes de opinião.</a:t>
-            </a:r>
-          </a:p>
-          <a:p>
-            <a:pPr marL="215900" indent="-215900" algn="just">
+              <a:t>D)	converte sinais do detector em outra forma capaz de ser enviada a um instrumento receptor.</a:t>
+            </a:r>
+          </a:p>
+          <a:p>
+            <a:pPr marL="447675" indent="-447675" algn="just">
               <a:lnSpc>
                 <a:spcPct val="107000"/>
               </a:lnSpc>
+              <a:spcAft>
+                <a:spcPts val="600"/>
+              </a:spcAft>
             </a:pPr>
             <a:r>
-              <a:rPr lang="pt-BR" sz="2200" dirty="0">
+              <a:rPr lang="pt-BR" sz="2200" spc="15" dirty="0">
                 <a:latin typeface="Arial" panose="020B0604020202020204" pitchFamily="34" charset="0"/>
                 <a:ea typeface="Calibri" panose="020F0502020204030204" pitchFamily="34" charset="0"/>
                 <a:cs typeface="Arial" panose="020B0604020202020204" pitchFamily="34" charset="0"/>
               </a:rPr>
-              <a:t>E) grupo de dissociação.</a:t>
+              <a:t>E)	recebe uma informação na forma de sinal, altera essa forma e emite um sinal proporcional ao de entrada.</a:t>
             </a:r>
           </a:p>
         </p:txBody>
       </p:sp>
     </p:spTree>
-    <p:extLst>
-      <p:ext uri="{BB962C8B-B14F-4D97-AF65-F5344CB8AC3E}">
-        <p14:creationId xmlns:p14="http://schemas.microsoft.com/office/powerpoint/2010/main" val="2176294315"/>
-      </p:ext>
-    </p:extLst>
   </p:cSld>
   <p:clrMapOvr>
     <a:masterClrMapping/>
